--- a/docs/plots/grant/jx_grant_linsubhr_diff_akikdigo.pptx
+++ b/docs/plots/grant/jx_grant_linsubhr_diff_akikdigo.pptx
@@ -2271,7 +2271,7 @@
           </p:nvSpPr>
           <p:spPr>
             <a:xfrm>
-              <a:off x="915645" y="5038294"/>
+              <a:off x="915645" y="5067975"/>
               <a:ext cx="7682587" cy="0"/>
             </a:xfrm>
             <a:custGeom>
@@ -2314,7 +2314,7 @@
           </p:nvSpPr>
           <p:spPr>
             <a:xfrm>
-              <a:off x="915645" y="4273666"/>
+              <a:off x="915645" y="4288924"/>
               <a:ext cx="7682587" cy="0"/>
             </a:xfrm>
             <a:custGeom>
@@ -2357,7 +2357,7 @@
           </p:nvSpPr>
           <p:spPr>
             <a:xfrm>
-              <a:off x="915645" y="3509037"/>
+              <a:off x="915645" y="3509873"/>
               <a:ext cx="7682587" cy="0"/>
             </a:xfrm>
             <a:custGeom>
@@ -2400,7 +2400,7 @@
           </p:nvSpPr>
           <p:spPr>
             <a:xfrm>
-              <a:off x="915645" y="2744409"/>
+              <a:off x="915645" y="2730822"/>
               <a:ext cx="7682587" cy="0"/>
             </a:xfrm>
             <a:custGeom>
@@ -2443,15 +2443,15 @@
           </p:nvSpPr>
           <p:spPr>
             <a:xfrm>
-              <a:off x="1701364" y="2209169"/>
-              <a:ext cx="0" cy="3364365"/>
+              <a:off x="1264853" y="2185486"/>
+              <a:ext cx="0" cy="3427824"/>
             </a:xfrm>
             <a:custGeom>
               <a:avLst/>
               <a:pathLst>
-                <a:path w="0" h="3364365">
+                <a:path w="0" h="3427824">
                   <a:moveTo>
-                    <a:pt x="0" y="3364365"/>
+                    <a:pt x="0" y="3427824"/>
                   </a:moveTo>
                   <a:lnTo>
                     <a:pt x="0" y="0"/>
@@ -2486,15 +2486,15 @@
           </p:nvSpPr>
           <p:spPr>
             <a:xfrm>
-              <a:off x="3447406" y="2209169"/>
-              <a:ext cx="0" cy="3364365"/>
+              <a:off x="2137874" y="2185486"/>
+              <a:ext cx="0" cy="3427824"/>
             </a:xfrm>
             <a:custGeom>
               <a:avLst/>
               <a:pathLst>
-                <a:path w="0" h="3364365">
+                <a:path w="0" h="3427824">
                   <a:moveTo>
-                    <a:pt x="0" y="3364365"/>
+                    <a:pt x="0" y="3427824"/>
                   </a:moveTo>
                   <a:lnTo>
                     <a:pt x="0" y="0"/>
@@ -2529,15 +2529,15 @@
           </p:nvSpPr>
           <p:spPr>
             <a:xfrm>
-              <a:off x="5193449" y="2209169"/>
-              <a:ext cx="0" cy="3364365"/>
+              <a:off x="3010896" y="2185486"/>
+              <a:ext cx="0" cy="3427824"/>
             </a:xfrm>
             <a:custGeom>
               <a:avLst/>
               <a:pathLst>
-                <a:path w="0" h="3364365">
+                <a:path w="0" h="3427824">
                   <a:moveTo>
-                    <a:pt x="0" y="3364365"/>
+                    <a:pt x="0" y="3427824"/>
                   </a:moveTo>
                   <a:lnTo>
                     <a:pt x="0" y="0"/>
@@ -2572,15 +2572,15 @@
           </p:nvSpPr>
           <p:spPr>
             <a:xfrm>
-              <a:off x="6939491" y="2209169"/>
-              <a:ext cx="0" cy="3364365"/>
+              <a:off x="3883917" y="2185486"/>
+              <a:ext cx="0" cy="3427824"/>
             </a:xfrm>
             <a:custGeom>
               <a:avLst/>
               <a:pathLst>
-                <a:path w="0" h="3364365">
+                <a:path w="0" h="3427824">
                   <a:moveTo>
-                    <a:pt x="0" y="3364365"/>
+                    <a:pt x="0" y="3427824"/>
                   </a:moveTo>
                   <a:lnTo>
                     <a:pt x="0" y="0"/>
@@ -2615,26 +2615,26 @@
           </p:nvSpPr>
           <p:spPr>
             <a:xfrm>
-              <a:off x="915645" y="5420609"/>
-              <a:ext cx="7682587" cy="0"/>
+              <a:off x="4756938" y="2185486"/>
+              <a:ext cx="0" cy="3427824"/>
             </a:xfrm>
             <a:custGeom>
               <a:avLst/>
               <a:pathLst>
-                <a:path w="7682587" h="0">
+                <a:path w="0" h="3427824">
                   <a:moveTo>
+                    <a:pt x="0" y="3427824"/>
+                  </a:moveTo>
+                  <a:lnTo>
                     <a:pt x="0" y="0"/>
-                  </a:moveTo>
-                  <a:lnTo>
-                    <a:pt x="7682587" y="0"/>
-                  </a:lnTo>
-                  <a:lnTo>
-                    <a:pt x="7682587" y="0"/>
+                  </a:lnTo>
+                  <a:lnTo>
+                    <a:pt x="0" y="0"/>
                   </a:lnTo>
                 </a:path>
               </a:pathLst>
             </a:custGeom>
-            <a:ln w="17246" cap="flat">
+            <a:ln w="8623" cap="flat">
               <a:solidFill>
                 <a:srgbClr val="EBEBEB">
                   <a:alpha val="100000"/>
@@ -2658,26 +2658,26 @@
           </p:nvSpPr>
           <p:spPr>
             <a:xfrm>
-              <a:off x="915645" y="4655980"/>
-              <a:ext cx="7682587" cy="0"/>
+              <a:off x="5629959" y="2185486"/>
+              <a:ext cx="0" cy="3427824"/>
             </a:xfrm>
             <a:custGeom>
               <a:avLst/>
               <a:pathLst>
-                <a:path w="7682587" h="0">
+                <a:path w="0" h="3427824">
                   <a:moveTo>
+                    <a:pt x="0" y="3427824"/>
+                  </a:moveTo>
+                  <a:lnTo>
                     <a:pt x="0" y="0"/>
-                  </a:moveTo>
-                  <a:lnTo>
-                    <a:pt x="7682587" y="0"/>
-                  </a:lnTo>
-                  <a:lnTo>
-                    <a:pt x="7682587" y="0"/>
+                  </a:lnTo>
+                  <a:lnTo>
+                    <a:pt x="0" y="0"/>
                   </a:lnTo>
                 </a:path>
               </a:pathLst>
             </a:custGeom>
-            <a:ln w="17246" cap="flat">
+            <a:ln w="8623" cap="flat">
               <a:solidFill>
                 <a:srgbClr val="EBEBEB">
                   <a:alpha val="100000"/>
@@ -2701,26 +2701,26 @@
           </p:nvSpPr>
           <p:spPr>
             <a:xfrm>
-              <a:off x="915645" y="3891352"/>
-              <a:ext cx="7682587" cy="0"/>
+              <a:off x="6502981" y="2185486"/>
+              <a:ext cx="0" cy="3427824"/>
             </a:xfrm>
             <a:custGeom>
               <a:avLst/>
               <a:pathLst>
-                <a:path w="7682587" h="0">
+                <a:path w="0" h="3427824">
                   <a:moveTo>
+                    <a:pt x="0" y="3427824"/>
+                  </a:moveTo>
+                  <a:lnTo>
                     <a:pt x="0" y="0"/>
-                  </a:moveTo>
-                  <a:lnTo>
-                    <a:pt x="7682587" y="0"/>
-                  </a:lnTo>
-                  <a:lnTo>
-                    <a:pt x="7682587" y="0"/>
+                  </a:lnTo>
+                  <a:lnTo>
+                    <a:pt x="0" y="0"/>
                   </a:lnTo>
                 </a:path>
               </a:pathLst>
             </a:custGeom>
-            <a:ln w="17246" cap="flat">
+            <a:ln w="8623" cap="flat">
               <a:solidFill>
                 <a:srgbClr val="EBEBEB">
                   <a:alpha val="100000"/>
@@ -2744,26 +2744,26 @@
           </p:nvSpPr>
           <p:spPr>
             <a:xfrm>
-              <a:off x="915645" y="3126723"/>
-              <a:ext cx="7682587" cy="0"/>
+              <a:off x="7376002" y="2185486"/>
+              <a:ext cx="0" cy="3427824"/>
             </a:xfrm>
             <a:custGeom>
               <a:avLst/>
               <a:pathLst>
-                <a:path w="7682587" h="0">
+                <a:path w="0" h="3427824">
                   <a:moveTo>
+                    <a:pt x="0" y="3427824"/>
+                  </a:moveTo>
+                  <a:lnTo>
                     <a:pt x="0" y="0"/>
-                  </a:moveTo>
-                  <a:lnTo>
-                    <a:pt x="7682587" y="0"/>
-                  </a:lnTo>
-                  <a:lnTo>
-                    <a:pt x="7682587" y="0"/>
+                  </a:lnTo>
+                  <a:lnTo>
+                    <a:pt x="0" y="0"/>
                   </a:lnTo>
                 </a:path>
               </a:pathLst>
             </a:custGeom>
-            <a:ln w="17246" cap="flat">
+            <a:ln w="8623" cap="flat">
               <a:solidFill>
                 <a:srgbClr val="EBEBEB">
                   <a:alpha val="100000"/>
@@ -2787,26 +2787,26 @@
           </p:nvSpPr>
           <p:spPr>
             <a:xfrm>
-              <a:off x="915645" y="2362095"/>
-              <a:ext cx="7682587" cy="0"/>
+              <a:off x="8249023" y="2185486"/>
+              <a:ext cx="0" cy="3427824"/>
             </a:xfrm>
             <a:custGeom>
               <a:avLst/>
               <a:pathLst>
-                <a:path w="7682587" h="0">
+                <a:path w="0" h="3427824">
                   <a:moveTo>
+                    <a:pt x="0" y="3427824"/>
+                  </a:moveTo>
+                  <a:lnTo>
                     <a:pt x="0" y="0"/>
-                  </a:moveTo>
-                  <a:lnTo>
-                    <a:pt x="7682587" y="0"/>
-                  </a:lnTo>
-                  <a:lnTo>
-                    <a:pt x="7682587" y="0"/>
+                  </a:lnTo>
+                  <a:lnTo>
+                    <a:pt x="0" y="0"/>
                   </a:lnTo>
                 </a:path>
               </a:pathLst>
             </a:custGeom>
-            <a:ln w="17246" cap="flat">
+            <a:ln w="8623" cap="flat">
               <a:solidFill>
                 <a:srgbClr val="EBEBEB">
                   <a:alpha val="100000"/>
@@ -2830,21 +2830,21 @@
           </p:nvSpPr>
           <p:spPr>
             <a:xfrm>
-              <a:off x="2574385" y="2209169"/>
-              <a:ext cx="0" cy="3364365"/>
+              <a:off x="915645" y="5457500"/>
+              <a:ext cx="7682587" cy="0"/>
             </a:xfrm>
             <a:custGeom>
               <a:avLst/>
               <a:pathLst>
-                <a:path w="0" h="3364365">
+                <a:path w="7682587" h="0">
                   <a:moveTo>
-                    <a:pt x="0" y="3364365"/>
+                    <a:pt x="0" y="0"/>
                   </a:moveTo>
                   <a:lnTo>
-                    <a:pt x="0" y="0"/>
-                  </a:lnTo>
-                  <a:lnTo>
-                    <a:pt x="0" y="0"/>
+                    <a:pt x="7682587" y="0"/>
+                  </a:lnTo>
+                  <a:lnTo>
+                    <a:pt x="7682587" y="0"/>
                   </a:lnTo>
                 </a:path>
               </a:pathLst>
@@ -2873,21 +2873,21 @@
           </p:nvSpPr>
           <p:spPr>
             <a:xfrm>
-              <a:off x="4320427" y="2209169"/>
-              <a:ext cx="0" cy="3364365"/>
+              <a:off x="915645" y="4678449"/>
+              <a:ext cx="7682587" cy="0"/>
             </a:xfrm>
             <a:custGeom>
               <a:avLst/>
               <a:pathLst>
-                <a:path w="0" h="3364365">
+                <a:path w="7682587" h="0">
                   <a:moveTo>
-                    <a:pt x="0" y="3364365"/>
+                    <a:pt x="0" y="0"/>
                   </a:moveTo>
                   <a:lnTo>
-                    <a:pt x="0" y="0"/>
-                  </a:lnTo>
-                  <a:lnTo>
-                    <a:pt x="0" y="0"/>
+                    <a:pt x="7682587" y="0"/>
+                  </a:lnTo>
+                  <a:lnTo>
+                    <a:pt x="7682587" y="0"/>
                   </a:lnTo>
                 </a:path>
               </a:pathLst>
@@ -2916,21 +2916,21 @@
           </p:nvSpPr>
           <p:spPr>
             <a:xfrm>
-              <a:off x="6066470" y="2209169"/>
-              <a:ext cx="0" cy="3364365"/>
+              <a:off x="915645" y="3899398"/>
+              <a:ext cx="7682587" cy="0"/>
             </a:xfrm>
             <a:custGeom>
               <a:avLst/>
               <a:pathLst>
-                <a:path w="0" h="3364365">
+                <a:path w="7682587" h="0">
                   <a:moveTo>
-                    <a:pt x="0" y="3364365"/>
+                    <a:pt x="0" y="0"/>
                   </a:moveTo>
                   <a:lnTo>
-                    <a:pt x="0" y="0"/>
-                  </a:lnTo>
-                  <a:lnTo>
-                    <a:pt x="0" y="0"/>
+                    <a:pt x="7682587" y="0"/>
+                  </a:lnTo>
+                  <a:lnTo>
+                    <a:pt x="7682587" y="0"/>
                   </a:lnTo>
                 </a:path>
               </a:pathLst>
@@ -2959,21 +2959,21 @@
           </p:nvSpPr>
           <p:spPr>
             <a:xfrm>
-              <a:off x="7812512" y="2209169"/>
-              <a:ext cx="0" cy="3364365"/>
+              <a:off x="915645" y="3120347"/>
+              <a:ext cx="7682587" cy="0"/>
             </a:xfrm>
             <a:custGeom>
               <a:avLst/>
               <a:pathLst>
-                <a:path w="0" h="3364365">
+                <a:path w="7682587" h="0">
                   <a:moveTo>
-                    <a:pt x="0" y="3364365"/>
+                    <a:pt x="0" y="0"/>
                   </a:moveTo>
                   <a:lnTo>
-                    <a:pt x="0" y="0"/>
-                  </a:lnTo>
-                  <a:lnTo>
-                    <a:pt x="0" y="0"/>
+                    <a:pt x="7682587" y="0"/>
+                  </a:lnTo>
+                  <a:lnTo>
+                    <a:pt x="7682587" y="0"/>
                   </a:lnTo>
                 </a:path>
               </a:pathLst>
@@ -2996,528 +2996,915 @@
         </p:sp>
         <p:sp>
           <p:nvSpPr>
-            <p:cNvPr id="21" name="pg21"/>
+            <p:cNvPr id="21" name="pl21"/>
             <p:cNvSpPr/>
             <p:nvPr/>
           </p:nvSpPr>
           <p:spPr>
             <a:xfrm>
-              <a:off x="915645" y="2209169"/>
-              <a:ext cx="7260303" cy="3189201"/>
+              <a:off x="915645" y="2341296"/>
+              <a:ext cx="7682587" cy="0"/>
             </a:xfrm>
             <a:custGeom>
               <a:avLst/>
               <a:pathLst>
-                <a:path w="7260303" h="3189201">
+                <a:path w="7682587" h="0">
+                  <a:moveTo>
+                    <a:pt x="0" y="0"/>
+                  </a:moveTo>
+                  <a:lnTo>
+                    <a:pt x="7682587" y="0"/>
+                  </a:lnTo>
+                  <a:lnTo>
+                    <a:pt x="7682587" y="0"/>
+                  </a:lnTo>
+                </a:path>
+              </a:pathLst>
+            </a:custGeom>
+            <a:ln w="17246" cap="flat">
+              <a:solidFill>
+                <a:srgbClr val="EBEBEB">
+                  <a:alpha val="100000"/>
+                </a:srgbClr>
+              </a:solidFill>
+              <a:prstDash val="solid"/>
+              <a:round/>
+            </a:ln>
+          </p:spPr>
+          <p:txBody>
+            <a:bodyPr/>
+            <a:lstStyle/>
+            <a:p/>
+          </p:txBody>
+        </p:sp>
+        <p:sp>
+          <p:nvSpPr>
+            <p:cNvPr id="22" name="pl22"/>
+            <p:cNvSpPr/>
+            <p:nvPr/>
+          </p:nvSpPr>
+          <p:spPr>
+            <a:xfrm>
+              <a:off x="1701364" y="2185486"/>
+              <a:ext cx="0" cy="3427824"/>
+            </a:xfrm>
+            <a:custGeom>
+              <a:avLst/>
+              <a:pathLst>
+                <a:path w="0" h="3427824">
+                  <a:moveTo>
+                    <a:pt x="0" y="3427824"/>
+                  </a:moveTo>
+                  <a:lnTo>
+                    <a:pt x="0" y="0"/>
+                  </a:lnTo>
+                  <a:lnTo>
+                    <a:pt x="0" y="0"/>
+                  </a:lnTo>
+                </a:path>
+              </a:pathLst>
+            </a:custGeom>
+            <a:ln w="17246" cap="flat">
+              <a:solidFill>
+                <a:srgbClr val="EBEBEB">
+                  <a:alpha val="100000"/>
+                </a:srgbClr>
+              </a:solidFill>
+              <a:prstDash val="solid"/>
+              <a:round/>
+            </a:ln>
+          </p:spPr>
+          <p:txBody>
+            <a:bodyPr/>
+            <a:lstStyle/>
+            <a:p/>
+          </p:txBody>
+        </p:sp>
+        <p:sp>
+          <p:nvSpPr>
+            <p:cNvPr id="23" name="pl23"/>
+            <p:cNvSpPr/>
+            <p:nvPr/>
+          </p:nvSpPr>
+          <p:spPr>
+            <a:xfrm>
+              <a:off x="2574385" y="2185486"/>
+              <a:ext cx="0" cy="3427824"/>
+            </a:xfrm>
+            <a:custGeom>
+              <a:avLst/>
+              <a:pathLst>
+                <a:path w="0" h="3427824">
+                  <a:moveTo>
+                    <a:pt x="0" y="3427824"/>
+                  </a:moveTo>
+                  <a:lnTo>
+                    <a:pt x="0" y="0"/>
+                  </a:lnTo>
+                  <a:lnTo>
+                    <a:pt x="0" y="0"/>
+                  </a:lnTo>
+                </a:path>
+              </a:pathLst>
+            </a:custGeom>
+            <a:ln w="17246" cap="flat">
+              <a:solidFill>
+                <a:srgbClr val="EBEBEB">
+                  <a:alpha val="100000"/>
+                </a:srgbClr>
+              </a:solidFill>
+              <a:prstDash val="solid"/>
+              <a:round/>
+            </a:ln>
+          </p:spPr>
+          <p:txBody>
+            <a:bodyPr/>
+            <a:lstStyle/>
+            <a:p/>
+          </p:txBody>
+        </p:sp>
+        <p:sp>
+          <p:nvSpPr>
+            <p:cNvPr id="24" name="pl24"/>
+            <p:cNvSpPr/>
+            <p:nvPr/>
+          </p:nvSpPr>
+          <p:spPr>
+            <a:xfrm>
+              <a:off x="3447406" y="2185486"/>
+              <a:ext cx="0" cy="3427824"/>
+            </a:xfrm>
+            <a:custGeom>
+              <a:avLst/>
+              <a:pathLst>
+                <a:path w="0" h="3427824">
+                  <a:moveTo>
+                    <a:pt x="0" y="3427824"/>
+                  </a:moveTo>
+                  <a:lnTo>
+                    <a:pt x="0" y="0"/>
+                  </a:lnTo>
+                  <a:lnTo>
+                    <a:pt x="0" y="0"/>
+                  </a:lnTo>
+                </a:path>
+              </a:pathLst>
+            </a:custGeom>
+            <a:ln w="17246" cap="flat">
+              <a:solidFill>
+                <a:srgbClr val="EBEBEB">
+                  <a:alpha val="100000"/>
+                </a:srgbClr>
+              </a:solidFill>
+              <a:prstDash val="solid"/>
+              <a:round/>
+            </a:ln>
+          </p:spPr>
+          <p:txBody>
+            <a:bodyPr/>
+            <a:lstStyle/>
+            <a:p/>
+          </p:txBody>
+        </p:sp>
+        <p:sp>
+          <p:nvSpPr>
+            <p:cNvPr id="25" name="pl25"/>
+            <p:cNvSpPr/>
+            <p:nvPr/>
+          </p:nvSpPr>
+          <p:spPr>
+            <a:xfrm>
+              <a:off x="4320427" y="2185486"/>
+              <a:ext cx="0" cy="3427824"/>
+            </a:xfrm>
+            <a:custGeom>
+              <a:avLst/>
+              <a:pathLst>
+                <a:path w="0" h="3427824">
+                  <a:moveTo>
+                    <a:pt x="0" y="3427824"/>
+                  </a:moveTo>
+                  <a:lnTo>
+                    <a:pt x="0" y="0"/>
+                  </a:lnTo>
+                  <a:lnTo>
+                    <a:pt x="0" y="0"/>
+                  </a:lnTo>
+                </a:path>
+              </a:pathLst>
+            </a:custGeom>
+            <a:ln w="17246" cap="flat">
+              <a:solidFill>
+                <a:srgbClr val="EBEBEB">
+                  <a:alpha val="100000"/>
+                </a:srgbClr>
+              </a:solidFill>
+              <a:prstDash val="solid"/>
+              <a:round/>
+            </a:ln>
+          </p:spPr>
+          <p:txBody>
+            <a:bodyPr/>
+            <a:lstStyle/>
+            <a:p/>
+          </p:txBody>
+        </p:sp>
+        <p:sp>
+          <p:nvSpPr>
+            <p:cNvPr id="26" name="pl26"/>
+            <p:cNvSpPr/>
+            <p:nvPr/>
+          </p:nvSpPr>
+          <p:spPr>
+            <a:xfrm>
+              <a:off x="5193449" y="2185486"/>
+              <a:ext cx="0" cy="3427824"/>
+            </a:xfrm>
+            <a:custGeom>
+              <a:avLst/>
+              <a:pathLst>
+                <a:path w="0" h="3427824">
+                  <a:moveTo>
+                    <a:pt x="0" y="3427824"/>
+                  </a:moveTo>
+                  <a:lnTo>
+                    <a:pt x="0" y="0"/>
+                  </a:lnTo>
+                  <a:lnTo>
+                    <a:pt x="0" y="0"/>
+                  </a:lnTo>
+                </a:path>
+              </a:pathLst>
+            </a:custGeom>
+            <a:ln w="17246" cap="flat">
+              <a:solidFill>
+                <a:srgbClr val="EBEBEB">
+                  <a:alpha val="100000"/>
+                </a:srgbClr>
+              </a:solidFill>
+              <a:prstDash val="solid"/>
+              <a:round/>
+            </a:ln>
+          </p:spPr>
+          <p:txBody>
+            <a:bodyPr/>
+            <a:lstStyle/>
+            <a:p/>
+          </p:txBody>
+        </p:sp>
+        <p:sp>
+          <p:nvSpPr>
+            <p:cNvPr id="27" name="pl27"/>
+            <p:cNvSpPr/>
+            <p:nvPr/>
+          </p:nvSpPr>
+          <p:spPr>
+            <a:xfrm>
+              <a:off x="6066470" y="2185486"/>
+              <a:ext cx="0" cy="3427824"/>
+            </a:xfrm>
+            <a:custGeom>
+              <a:avLst/>
+              <a:pathLst>
+                <a:path w="0" h="3427824">
+                  <a:moveTo>
+                    <a:pt x="0" y="3427824"/>
+                  </a:moveTo>
+                  <a:lnTo>
+                    <a:pt x="0" y="0"/>
+                  </a:lnTo>
+                  <a:lnTo>
+                    <a:pt x="0" y="0"/>
+                  </a:lnTo>
+                </a:path>
+              </a:pathLst>
+            </a:custGeom>
+            <a:ln w="17246" cap="flat">
+              <a:solidFill>
+                <a:srgbClr val="EBEBEB">
+                  <a:alpha val="100000"/>
+                </a:srgbClr>
+              </a:solidFill>
+              <a:prstDash val="solid"/>
+              <a:round/>
+            </a:ln>
+          </p:spPr>
+          <p:txBody>
+            <a:bodyPr/>
+            <a:lstStyle/>
+            <a:p/>
+          </p:txBody>
+        </p:sp>
+        <p:sp>
+          <p:nvSpPr>
+            <p:cNvPr id="28" name="pl28"/>
+            <p:cNvSpPr/>
+            <p:nvPr/>
+          </p:nvSpPr>
+          <p:spPr>
+            <a:xfrm>
+              <a:off x="6939491" y="2185486"/>
+              <a:ext cx="0" cy="3427824"/>
+            </a:xfrm>
+            <a:custGeom>
+              <a:avLst/>
+              <a:pathLst>
+                <a:path w="0" h="3427824">
+                  <a:moveTo>
+                    <a:pt x="0" y="3427824"/>
+                  </a:moveTo>
+                  <a:lnTo>
+                    <a:pt x="0" y="0"/>
+                  </a:lnTo>
+                  <a:lnTo>
+                    <a:pt x="0" y="0"/>
+                  </a:lnTo>
+                </a:path>
+              </a:pathLst>
+            </a:custGeom>
+            <a:ln w="17246" cap="flat">
+              <a:solidFill>
+                <a:srgbClr val="EBEBEB">
+                  <a:alpha val="100000"/>
+                </a:srgbClr>
+              </a:solidFill>
+              <a:prstDash val="solid"/>
+              <a:round/>
+            </a:ln>
+          </p:spPr>
+          <p:txBody>
+            <a:bodyPr/>
+            <a:lstStyle/>
+            <a:p/>
+          </p:txBody>
+        </p:sp>
+        <p:sp>
+          <p:nvSpPr>
+            <p:cNvPr id="29" name="pl29"/>
+            <p:cNvSpPr/>
+            <p:nvPr/>
+          </p:nvSpPr>
+          <p:spPr>
+            <a:xfrm>
+              <a:off x="7812512" y="2185486"/>
+              <a:ext cx="0" cy="3427824"/>
+            </a:xfrm>
+            <a:custGeom>
+              <a:avLst/>
+              <a:pathLst>
+                <a:path w="0" h="3427824">
+                  <a:moveTo>
+                    <a:pt x="0" y="3427824"/>
+                  </a:moveTo>
+                  <a:lnTo>
+                    <a:pt x="0" y="0"/>
+                  </a:lnTo>
+                  <a:lnTo>
+                    <a:pt x="0" y="0"/>
+                  </a:lnTo>
+                </a:path>
+              </a:pathLst>
+            </a:custGeom>
+            <a:ln w="17246" cap="flat">
+              <a:solidFill>
+                <a:srgbClr val="EBEBEB">
+                  <a:alpha val="100000"/>
+                </a:srgbClr>
+              </a:solidFill>
+              <a:prstDash val="solid"/>
+              <a:round/>
+            </a:ln>
+          </p:spPr>
+          <p:txBody>
+            <a:bodyPr/>
+            <a:lstStyle/>
+            <a:p/>
+          </p:txBody>
+        </p:sp>
+        <p:sp>
+          <p:nvSpPr>
+            <p:cNvPr id="30" name="pg30"/>
+            <p:cNvSpPr/>
+            <p:nvPr/>
+          </p:nvSpPr>
+          <p:spPr>
+            <a:xfrm>
+              <a:off x="915645" y="2185486"/>
+              <a:ext cx="7260303" cy="3249356"/>
+            </a:xfrm>
+            <a:custGeom>
+              <a:avLst/>
+              <a:pathLst>
+                <a:path w="7260303" h="3249356">
                   <a:moveTo>
                     <a:pt x="1743396" y="0"/>
                   </a:moveTo>
                   <a:lnTo>
-                    <a:pt x="1754576" y="33153"/>
-                  </a:lnTo>
-                  <a:lnTo>
-                    <a:pt x="1831044" y="244824"/>
-                  </a:lnTo>
-                  <a:lnTo>
-                    <a:pt x="1907513" y="442398"/>
-                  </a:lnTo>
-                  <a:lnTo>
-                    <a:pt x="1983981" y="626813"/>
-                  </a:lnTo>
-                  <a:lnTo>
-                    <a:pt x="2060450" y="798947"/>
-                  </a:lnTo>
-                  <a:lnTo>
-                    <a:pt x="2136918" y="959616"/>
-                  </a:lnTo>
-                  <a:lnTo>
-                    <a:pt x="2213386" y="1109586"/>
-                  </a:lnTo>
-                  <a:lnTo>
-                    <a:pt x="2289855" y="1249567"/>
-                  </a:lnTo>
-                  <a:lnTo>
-                    <a:pt x="2366323" y="1380226"/>
-                  </a:lnTo>
-                  <a:lnTo>
-                    <a:pt x="2442792" y="1502183"/>
-                  </a:lnTo>
-                  <a:lnTo>
-                    <a:pt x="2519260" y="1616018"/>
-                  </a:lnTo>
-                  <a:lnTo>
-                    <a:pt x="2595729" y="1722271"/>
-                  </a:lnTo>
-                  <a:lnTo>
-                    <a:pt x="2672197" y="1821448"/>
-                  </a:lnTo>
-                  <a:lnTo>
-                    <a:pt x="2748666" y="1914020"/>
-                  </a:lnTo>
-                  <a:lnTo>
-                    <a:pt x="2825134" y="2000427"/>
-                  </a:lnTo>
-                  <a:lnTo>
-                    <a:pt x="2901602" y="2081079"/>
-                  </a:lnTo>
-                  <a:lnTo>
-                    <a:pt x="2978071" y="2156360"/>
-                  </a:lnTo>
-                  <a:lnTo>
-                    <a:pt x="3054539" y="2226627"/>
-                  </a:lnTo>
-                  <a:lnTo>
-                    <a:pt x="3131008" y="2292215"/>
-                  </a:lnTo>
-                  <a:lnTo>
-                    <a:pt x="3207476" y="2353434"/>
-                  </a:lnTo>
-                  <a:lnTo>
-                    <a:pt x="3283945" y="2410577"/>
-                  </a:lnTo>
-                  <a:lnTo>
-                    <a:pt x="3360413" y="2444862"/>
-                  </a:lnTo>
-                  <a:lnTo>
-                    <a:pt x="3436881" y="2438895"/>
-                  </a:lnTo>
-                  <a:lnTo>
-                    <a:pt x="3513350" y="2432881"/>
-                  </a:lnTo>
-                  <a:lnTo>
-                    <a:pt x="3589818" y="2426821"/>
-                  </a:lnTo>
-                  <a:lnTo>
-                    <a:pt x="3666287" y="2420713"/>
-                  </a:lnTo>
-                  <a:lnTo>
-                    <a:pt x="3742755" y="2414558"/>
-                  </a:lnTo>
-                  <a:lnTo>
-                    <a:pt x="3819224" y="2408354"/>
-                  </a:lnTo>
-                  <a:lnTo>
-                    <a:pt x="3895692" y="2402103"/>
-                  </a:lnTo>
-                  <a:lnTo>
-                    <a:pt x="3972160" y="2395803"/>
-                  </a:lnTo>
-                  <a:lnTo>
-                    <a:pt x="4048629" y="2389454"/>
-                  </a:lnTo>
-                  <a:lnTo>
-                    <a:pt x="4125097" y="2383055"/>
-                  </a:lnTo>
-                  <a:lnTo>
-                    <a:pt x="4201566" y="2376607"/>
-                  </a:lnTo>
-                  <a:lnTo>
-                    <a:pt x="4278034" y="2370108"/>
-                  </a:lnTo>
-                  <a:lnTo>
-                    <a:pt x="4354503" y="2363559"/>
-                  </a:lnTo>
-                  <a:lnTo>
-                    <a:pt x="4430971" y="2356959"/>
-                  </a:lnTo>
-                  <a:lnTo>
-                    <a:pt x="4507439" y="2350307"/>
-                  </a:lnTo>
-                  <a:lnTo>
-                    <a:pt x="4583908" y="2343604"/>
-                  </a:lnTo>
-                  <a:lnTo>
-                    <a:pt x="4660376" y="2336848"/>
-                  </a:lnTo>
-                  <a:lnTo>
-                    <a:pt x="4736845" y="2330040"/>
-                  </a:lnTo>
-                  <a:lnTo>
-                    <a:pt x="4813313" y="2323179"/>
-                  </a:lnTo>
-                  <a:lnTo>
-                    <a:pt x="4889782" y="2316265"/>
-                  </a:lnTo>
-                  <a:lnTo>
-                    <a:pt x="4966250" y="2309296"/>
-                  </a:lnTo>
-                  <a:lnTo>
-                    <a:pt x="5042719" y="2302274"/>
-                  </a:lnTo>
-                  <a:lnTo>
-                    <a:pt x="5119187" y="2295197"/>
-                  </a:lnTo>
-                  <a:lnTo>
-                    <a:pt x="5195655" y="2288064"/>
-                  </a:lnTo>
-                  <a:lnTo>
-                    <a:pt x="5272124" y="2280876"/>
-                  </a:lnTo>
-                  <a:lnTo>
-                    <a:pt x="5348592" y="2273633"/>
-                  </a:lnTo>
-                  <a:lnTo>
-                    <a:pt x="5425061" y="2266333"/>
-                  </a:lnTo>
-                  <a:lnTo>
-                    <a:pt x="5501529" y="2258976"/>
-                  </a:lnTo>
-                  <a:lnTo>
-                    <a:pt x="5577998" y="2251561"/>
-                  </a:lnTo>
-                  <a:lnTo>
-                    <a:pt x="5654466" y="2244089"/>
-                  </a:lnTo>
-                  <a:lnTo>
-                    <a:pt x="5730934" y="2236559"/>
-                  </a:lnTo>
-                  <a:lnTo>
-                    <a:pt x="5807403" y="2228970"/>
-                  </a:lnTo>
-                  <a:lnTo>
-                    <a:pt x="5883871" y="2221322"/>
-                  </a:lnTo>
-                  <a:lnTo>
-                    <a:pt x="5960340" y="2213615"/>
-                  </a:lnTo>
-                  <a:lnTo>
-                    <a:pt x="6036808" y="2205848"/>
-                  </a:lnTo>
-                  <a:lnTo>
-                    <a:pt x="6113277" y="2198020"/>
-                  </a:lnTo>
-                  <a:lnTo>
-                    <a:pt x="6189745" y="2190131"/>
-                  </a:lnTo>
-                  <a:lnTo>
-                    <a:pt x="6266213" y="2182181"/>
-                  </a:lnTo>
-                  <a:lnTo>
-                    <a:pt x="6342682" y="2174169"/>
-                  </a:lnTo>
-                  <a:lnTo>
-                    <a:pt x="6419150" y="2166094"/>
-                  </a:lnTo>
-                  <a:lnTo>
-                    <a:pt x="6495619" y="2157957"/>
-                  </a:lnTo>
-                  <a:lnTo>
-                    <a:pt x="6572087" y="2149757"/>
-                  </a:lnTo>
-                  <a:lnTo>
-                    <a:pt x="6648556" y="2141492"/>
-                  </a:lnTo>
-                  <a:lnTo>
-                    <a:pt x="6725024" y="2133163"/>
-                  </a:lnTo>
-                  <a:lnTo>
-                    <a:pt x="6801492" y="2124770"/>
-                  </a:lnTo>
-                  <a:lnTo>
-                    <a:pt x="6877961" y="2116311"/>
-                  </a:lnTo>
-                  <a:lnTo>
-                    <a:pt x="6954429" y="2107786"/>
-                  </a:lnTo>
-                  <a:lnTo>
-                    <a:pt x="7030898" y="2099195"/>
-                  </a:lnTo>
-                  <a:lnTo>
-                    <a:pt x="7107366" y="2090537"/>
-                  </a:lnTo>
-                  <a:lnTo>
-                    <a:pt x="7183835" y="2081811"/>
-                  </a:lnTo>
-                  <a:lnTo>
-                    <a:pt x="7260303" y="2073018"/>
-                  </a:lnTo>
-                  <a:lnTo>
-                    <a:pt x="7260303" y="3189201"/>
-                  </a:lnTo>
-                  <a:lnTo>
-                    <a:pt x="7183835" y="3187614"/>
-                  </a:lnTo>
-                  <a:lnTo>
-                    <a:pt x="7107366" y="3185914"/>
-                  </a:lnTo>
-                  <a:lnTo>
-                    <a:pt x="7030898" y="3184093"/>
-                  </a:lnTo>
-                  <a:lnTo>
-                    <a:pt x="6954429" y="3182141"/>
-                  </a:lnTo>
-                  <a:lnTo>
-                    <a:pt x="6877961" y="3180051"/>
-                  </a:lnTo>
-                  <a:lnTo>
-                    <a:pt x="6801492" y="3177811"/>
-                  </a:lnTo>
-                  <a:lnTo>
-                    <a:pt x="6725024" y="3175412"/>
-                  </a:lnTo>
-                  <a:lnTo>
-                    <a:pt x="6648556" y="3172842"/>
-                  </a:lnTo>
-                  <a:lnTo>
-                    <a:pt x="6572087" y="3170088"/>
-                  </a:lnTo>
-                  <a:lnTo>
-                    <a:pt x="6495619" y="3167137"/>
-                  </a:lnTo>
-                  <a:lnTo>
-                    <a:pt x="6419150" y="3163976"/>
-                  </a:lnTo>
-                  <a:lnTo>
-                    <a:pt x="6342682" y="3160590"/>
-                  </a:lnTo>
-                  <a:lnTo>
-                    <a:pt x="6266213" y="3156961"/>
-                  </a:lnTo>
-                  <a:lnTo>
-                    <a:pt x="6189745" y="3153074"/>
-                  </a:lnTo>
-                  <a:lnTo>
-                    <a:pt x="6113277" y="3148910"/>
-                  </a:lnTo>
-                  <a:lnTo>
-                    <a:pt x="6036808" y="3144448"/>
-                  </a:lnTo>
-                  <a:lnTo>
-                    <a:pt x="5960340" y="3139669"/>
-                  </a:lnTo>
-                  <a:lnTo>
-                    <a:pt x="5883871" y="3134548"/>
-                  </a:lnTo>
-                  <a:lnTo>
-                    <a:pt x="5807403" y="3129061"/>
-                  </a:lnTo>
-                  <a:lnTo>
-                    <a:pt x="5730934" y="3123184"/>
-                  </a:lnTo>
-                  <a:lnTo>
-                    <a:pt x="5654466" y="3116887"/>
-                  </a:lnTo>
-                  <a:lnTo>
-                    <a:pt x="5577998" y="3110140"/>
-                  </a:lnTo>
-                  <a:lnTo>
-                    <a:pt x="5501529" y="3102912"/>
-                  </a:lnTo>
-                  <a:lnTo>
-                    <a:pt x="5425061" y="3095169"/>
-                  </a:lnTo>
-                  <a:lnTo>
-                    <a:pt x="5348592" y="3086873"/>
-                  </a:lnTo>
-                  <a:lnTo>
-                    <a:pt x="5272124" y="3077985"/>
-                  </a:lnTo>
-                  <a:lnTo>
-                    <a:pt x="5195655" y="3068463"/>
-                  </a:lnTo>
-                  <a:lnTo>
-                    <a:pt x="5119187" y="3058261"/>
-                  </a:lnTo>
-                  <a:lnTo>
-                    <a:pt x="5042719" y="3047332"/>
-                  </a:lnTo>
-                  <a:lnTo>
-                    <a:pt x="4966250" y="3035623"/>
-                  </a:lnTo>
-                  <a:lnTo>
-                    <a:pt x="4889782" y="3023078"/>
-                  </a:lnTo>
-                  <a:lnTo>
-                    <a:pt x="4813313" y="3009638"/>
-                  </a:lnTo>
-                  <a:lnTo>
-                    <a:pt x="4736845" y="2995240"/>
-                  </a:lnTo>
-                  <a:lnTo>
-                    <a:pt x="4660376" y="2979814"/>
-                  </a:lnTo>
-                  <a:lnTo>
-                    <a:pt x="4583908" y="2963287"/>
-                  </a:lnTo>
-                  <a:lnTo>
-                    <a:pt x="4507439" y="2945581"/>
-                  </a:lnTo>
-                  <a:lnTo>
-                    <a:pt x="4430971" y="2926612"/>
-                  </a:lnTo>
-                  <a:lnTo>
-                    <a:pt x="4354503" y="2906289"/>
-                  </a:lnTo>
-                  <a:lnTo>
-                    <a:pt x="4278034" y="2884516"/>
-                  </a:lnTo>
-                  <a:lnTo>
-                    <a:pt x="4201566" y="2861190"/>
-                  </a:lnTo>
-                  <a:lnTo>
-                    <a:pt x="4125097" y="2836199"/>
-                  </a:lnTo>
-                  <a:lnTo>
-                    <a:pt x="4048629" y="2809426"/>
-                  </a:lnTo>
-                  <a:lnTo>
-                    <a:pt x="3972160" y="2780742"/>
-                  </a:lnTo>
-                  <a:lnTo>
-                    <a:pt x="3895692" y="2750011"/>
-                  </a:lnTo>
-                  <a:lnTo>
-                    <a:pt x="3819224" y="2717088"/>
-                  </a:lnTo>
-                  <a:lnTo>
-                    <a:pt x="3742755" y="2681815"/>
-                  </a:lnTo>
-                  <a:lnTo>
-                    <a:pt x="3666287" y="2644026"/>
-                  </a:lnTo>
-                  <a:lnTo>
-                    <a:pt x="3589818" y="2603541"/>
-                  </a:lnTo>
-                  <a:lnTo>
-                    <a:pt x="3513350" y="2560167"/>
-                  </a:lnTo>
-                  <a:lnTo>
-                    <a:pt x="3436881" y="2513698"/>
-                  </a:lnTo>
-                  <a:lnTo>
-                    <a:pt x="3360413" y="2463913"/>
-                  </a:lnTo>
-                  <a:lnTo>
-                    <a:pt x="3283945" y="2450783"/>
-                  </a:lnTo>
-                  <a:lnTo>
-                    <a:pt x="3207476" y="2456659"/>
-                  </a:lnTo>
-                  <a:lnTo>
-                    <a:pt x="3131008" y="2462489"/>
-                  </a:lnTo>
-                  <a:lnTo>
-                    <a:pt x="3054539" y="2468274"/>
-                  </a:lnTo>
-                  <a:lnTo>
-                    <a:pt x="2978071" y="2474014"/>
-                  </a:lnTo>
-                  <a:lnTo>
-                    <a:pt x="2901602" y="2479710"/>
-                  </a:lnTo>
-                  <a:lnTo>
-                    <a:pt x="2825134" y="2485362"/>
-                  </a:lnTo>
-                  <a:lnTo>
-                    <a:pt x="2748666" y="2490971"/>
-                  </a:lnTo>
-                  <a:lnTo>
-                    <a:pt x="2672197" y="2496536"/>
-                  </a:lnTo>
-                  <a:lnTo>
-                    <a:pt x="2595729" y="2502058"/>
-                  </a:lnTo>
-                  <a:lnTo>
-                    <a:pt x="2519260" y="2507537"/>
-                  </a:lnTo>
-                  <a:lnTo>
-                    <a:pt x="2442792" y="2512974"/>
-                  </a:lnTo>
-                  <a:lnTo>
-                    <a:pt x="2366323" y="2518369"/>
-                  </a:lnTo>
-                  <a:lnTo>
-                    <a:pt x="2289855" y="2523723"/>
-                  </a:lnTo>
-                  <a:lnTo>
-                    <a:pt x="2213386" y="2529035"/>
-                  </a:lnTo>
-                  <a:lnTo>
-                    <a:pt x="2136918" y="2534306"/>
-                  </a:lnTo>
-                  <a:lnTo>
-                    <a:pt x="2060450" y="2539536"/>
-                  </a:lnTo>
-                  <a:lnTo>
-                    <a:pt x="1983981" y="2544726"/>
-                  </a:lnTo>
-                  <a:lnTo>
-                    <a:pt x="1907513" y="2549876"/>
-                  </a:lnTo>
-                  <a:lnTo>
-                    <a:pt x="1831044" y="2554986"/>
-                  </a:lnTo>
-                  <a:lnTo>
-                    <a:pt x="1754576" y="2560056"/>
-                  </a:lnTo>
-                  <a:lnTo>
-                    <a:pt x="1678107" y="2565088"/>
-                  </a:lnTo>
-                  <a:lnTo>
-                    <a:pt x="1601639" y="2570080"/>
-                  </a:lnTo>
-                  <a:lnTo>
-                    <a:pt x="1525171" y="2575034"/>
-                  </a:lnTo>
-                  <a:lnTo>
-                    <a:pt x="1448702" y="2579950"/>
-                  </a:lnTo>
-                  <a:lnTo>
-                    <a:pt x="1372234" y="2584828"/>
-                  </a:lnTo>
-                  <a:lnTo>
-                    <a:pt x="1295765" y="2589668"/>
-                  </a:lnTo>
-                  <a:lnTo>
-                    <a:pt x="1219297" y="2594470"/>
-                  </a:lnTo>
-                  <a:lnTo>
-                    <a:pt x="1142828" y="2599236"/>
-                  </a:lnTo>
-                  <a:lnTo>
-                    <a:pt x="1066360" y="2603965"/>
-                  </a:lnTo>
-                  <a:lnTo>
-                    <a:pt x="989892" y="2608657"/>
-                  </a:lnTo>
-                  <a:lnTo>
-                    <a:pt x="913423" y="2613313"/>
-                  </a:lnTo>
-                  <a:lnTo>
-                    <a:pt x="836955" y="2617933"/>
-                  </a:lnTo>
-                  <a:lnTo>
-                    <a:pt x="760486" y="2622517"/>
-                  </a:lnTo>
-                  <a:lnTo>
-                    <a:pt x="684018" y="2627066"/>
-                  </a:lnTo>
-                  <a:lnTo>
-                    <a:pt x="607549" y="2631580"/>
-                  </a:lnTo>
-                  <a:lnTo>
-                    <a:pt x="531081" y="2636059"/>
-                  </a:lnTo>
-                  <a:lnTo>
-                    <a:pt x="454613" y="2640503"/>
-                  </a:lnTo>
-                  <a:lnTo>
-                    <a:pt x="378144" y="2644913"/>
-                  </a:lnTo>
-                  <a:lnTo>
-                    <a:pt x="301676" y="2649289"/>
-                  </a:lnTo>
-                  <a:lnTo>
-                    <a:pt x="225207" y="2653632"/>
-                  </a:lnTo>
-                  <a:lnTo>
-                    <a:pt x="148739" y="2657940"/>
-                  </a:lnTo>
-                  <a:lnTo>
-                    <a:pt x="72270" y="2662215"/>
-                  </a:lnTo>
-                  <a:lnTo>
-                    <a:pt x="0" y="2666225"/>
+                    <a:pt x="1754576" y="33779"/>
+                  </a:lnTo>
+                  <a:lnTo>
+                    <a:pt x="1831044" y="249442"/>
+                  </a:lnTo>
+                  <a:lnTo>
+                    <a:pt x="1907513" y="450742"/>
+                  </a:lnTo>
+                  <a:lnTo>
+                    <a:pt x="1983981" y="638636"/>
+                  </a:lnTo>
+                  <a:lnTo>
+                    <a:pt x="2060450" y="814017"/>
+                  </a:lnTo>
+                  <a:lnTo>
+                    <a:pt x="2136918" y="977717"/>
+                  </a:lnTo>
+                  <a:lnTo>
+                    <a:pt x="2213386" y="1130515"/>
+                  </a:lnTo>
+                  <a:lnTo>
+                    <a:pt x="2289855" y="1273137"/>
+                  </a:lnTo>
+                  <a:lnTo>
+                    <a:pt x="2366323" y="1406260"/>
+                  </a:lnTo>
+                  <a:lnTo>
+                    <a:pt x="2442792" y="1530517"/>
+                  </a:lnTo>
+                  <a:lnTo>
+                    <a:pt x="2519260" y="1646499"/>
+                  </a:lnTo>
+                  <a:lnTo>
+                    <a:pt x="2595729" y="1754757"/>
+                  </a:lnTo>
+                  <a:lnTo>
+                    <a:pt x="2672197" y="1855805"/>
+                  </a:lnTo>
+                  <a:lnTo>
+                    <a:pt x="2748666" y="1950123"/>
+                  </a:lnTo>
+                  <a:lnTo>
+                    <a:pt x="2825134" y="2038160"/>
+                  </a:lnTo>
+                  <a:lnTo>
+                    <a:pt x="2901602" y="2120333"/>
+                  </a:lnTo>
+                  <a:lnTo>
+                    <a:pt x="2978071" y="2197034"/>
+                  </a:lnTo>
+                  <a:lnTo>
+                    <a:pt x="3054539" y="2268626"/>
+                  </a:lnTo>
+                  <a:lnTo>
+                    <a:pt x="3131008" y="2335451"/>
+                  </a:lnTo>
+                  <a:lnTo>
+                    <a:pt x="3207476" y="2397825"/>
+                  </a:lnTo>
+                  <a:lnTo>
+                    <a:pt x="3283945" y="2456045"/>
+                  </a:lnTo>
+                  <a:lnTo>
+                    <a:pt x="3360413" y="2490978"/>
+                  </a:lnTo>
+                  <a:lnTo>
+                    <a:pt x="3436881" y="2484898"/>
+                  </a:lnTo>
+                  <a:lnTo>
+                    <a:pt x="3513350" y="2478771"/>
+                  </a:lnTo>
+                  <a:lnTo>
+                    <a:pt x="3589818" y="2472596"/>
+                  </a:lnTo>
+                  <a:lnTo>
+                    <a:pt x="3666287" y="2466373"/>
+                  </a:lnTo>
+                  <a:lnTo>
+                    <a:pt x="3742755" y="2460102"/>
+                  </a:lnTo>
+                  <a:lnTo>
+                    <a:pt x="3819224" y="2453781"/>
+                  </a:lnTo>
+                  <a:lnTo>
+                    <a:pt x="3895692" y="2447412"/>
+                  </a:lnTo>
+                  <a:lnTo>
+                    <a:pt x="3972160" y="2440993"/>
+                  </a:lnTo>
+                  <a:lnTo>
+                    <a:pt x="4048629" y="2434524"/>
+                  </a:lnTo>
+                  <a:lnTo>
+                    <a:pt x="4125097" y="2428005"/>
+                  </a:lnTo>
+                  <a:lnTo>
+                    <a:pt x="4201566" y="2421435"/>
+                  </a:lnTo>
+                  <a:lnTo>
+                    <a:pt x="4278034" y="2414814"/>
+                  </a:lnTo>
+                  <a:lnTo>
+                    <a:pt x="4354503" y="2408141"/>
+                  </a:lnTo>
+                  <a:lnTo>
+                    <a:pt x="4430971" y="2401416"/>
+                  </a:lnTo>
+                  <a:lnTo>
+                    <a:pt x="4507439" y="2394639"/>
+                  </a:lnTo>
+                  <a:lnTo>
+                    <a:pt x="4583908" y="2387809"/>
+                  </a:lnTo>
+                  <a:lnTo>
+                    <a:pt x="4660376" y="2380927"/>
+                  </a:lnTo>
+                  <a:lnTo>
+                    <a:pt x="4736845" y="2373990"/>
+                  </a:lnTo>
+                  <a:lnTo>
+                    <a:pt x="4813313" y="2367000"/>
+                  </a:lnTo>
+                  <a:lnTo>
+                    <a:pt x="4889782" y="2359955"/>
+                  </a:lnTo>
+                  <a:lnTo>
+                    <a:pt x="4966250" y="2352855"/>
+                  </a:lnTo>
+                  <a:lnTo>
+                    <a:pt x="5042719" y="2345700"/>
+                  </a:lnTo>
+                  <a:lnTo>
+                    <a:pt x="5119187" y="2338489"/>
+                  </a:lnTo>
+                  <a:lnTo>
+                    <a:pt x="5195655" y="2331222"/>
+                  </a:lnTo>
+                  <a:lnTo>
+                    <a:pt x="5272124" y="2323899"/>
+                  </a:lnTo>
+                  <a:lnTo>
+                    <a:pt x="5348592" y="2316518"/>
+                  </a:lnTo>
+                  <a:lnTo>
+                    <a:pt x="5425061" y="2309081"/>
+                  </a:lnTo>
+                  <a:lnTo>
+                    <a:pt x="5501529" y="2301585"/>
+                  </a:lnTo>
+                  <a:lnTo>
+                    <a:pt x="5577998" y="2294031"/>
+                  </a:lnTo>
+                  <a:lnTo>
+                    <a:pt x="5654466" y="2286418"/>
+                  </a:lnTo>
+                  <a:lnTo>
+                    <a:pt x="5730934" y="2278746"/>
+                  </a:lnTo>
+                  <a:lnTo>
+                    <a:pt x="5807403" y="2271014"/>
+                  </a:lnTo>
+                  <a:lnTo>
+                    <a:pt x="5883871" y="2263222"/>
+                  </a:lnTo>
+                  <a:lnTo>
+                    <a:pt x="5960340" y="2255369"/>
+                  </a:lnTo>
+                  <a:lnTo>
+                    <a:pt x="6036808" y="2247455"/>
+                  </a:lnTo>
+                  <a:lnTo>
+                    <a:pt x="6113277" y="2239479"/>
+                  </a:lnTo>
+                  <a:lnTo>
+                    <a:pt x="6189745" y="2231442"/>
+                  </a:lnTo>
+                  <a:lnTo>
+                    <a:pt x="6266213" y="2223342"/>
+                  </a:lnTo>
+                  <a:lnTo>
+                    <a:pt x="6342682" y="2215178"/>
+                  </a:lnTo>
+                  <a:lnTo>
+                    <a:pt x="6419150" y="2206952"/>
+                  </a:lnTo>
+                  <a:lnTo>
+                    <a:pt x="6495619" y="2198661"/>
+                  </a:lnTo>
+                  <a:lnTo>
+                    <a:pt x="6572087" y="2190306"/>
+                  </a:lnTo>
+                  <a:lnTo>
+                    <a:pt x="6648556" y="2181885"/>
+                  </a:lnTo>
+                  <a:lnTo>
+                    <a:pt x="6725024" y="2173399"/>
+                  </a:lnTo>
+                  <a:lnTo>
+                    <a:pt x="6801492" y="2164847"/>
+                  </a:lnTo>
+                  <a:lnTo>
+                    <a:pt x="6877961" y="2156229"/>
+                  </a:lnTo>
+                  <a:lnTo>
+                    <a:pt x="6954429" y="2147543"/>
+                  </a:lnTo>
+                  <a:lnTo>
+                    <a:pt x="7030898" y="2138790"/>
+                  </a:lnTo>
+                  <a:lnTo>
+                    <a:pt x="7107366" y="2129969"/>
+                  </a:lnTo>
+                  <a:lnTo>
+                    <a:pt x="7183835" y="2121079"/>
+                  </a:lnTo>
+                  <a:lnTo>
+                    <a:pt x="7260303" y="2112119"/>
+                  </a:lnTo>
+                  <a:lnTo>
+                    <a:pt x="7260303" y="3249356"/>
+                  </a:lnTo>
+                  <a:lnTo>
+                    <a:pt x="7183835" y="3247739"/>
+                  </a:lnTo>
+                  <a:lnTo>
+                    <a:pt x="7107366" y="3246007"/>
+                  </a:lnTo>
+                  <a:lnTo>
+                    <a:pt x="7030898" y="3244152"/>
+                  </a:lnTo>
+                  <a:lnTo>
+                    <a:pt x="6954429" y="3242164"/>
+                  </a:lnTo>
+                  <a:lnTo>
+                    <a:pt x="6877961" y="3240034"/>
+                  </a:lnTo>
+                  <a:lnTo>
+                    <a:pt x="6801492" y="3237752"/>
+                  </a:lnTo>
+                  <a:lnTo>
+                    <a:pt x="6725024" y="3235307"/>
+                  </a:lnTo>
+                  <a:lnTo>
+                    <a:pt x="6648556" y="3232688"/>
+                  </a:lnTo>
+                  <a:lnTo>
+                    <a:pt x="6572087" y="3229882"/>
+                  </a:lnTo>
+                  <a:lnTo>
+                    <a:pt x="6495619" y="3226876"/>
+                  </a:lnTo>
+                  <a:lnTo>
+                    <a:pt x="6419150" y="3223656"/>
+                  </a:lnTo>
+                  <a:lnTo>
+                    <a:pt x="6342682" y="3220205"/>
+                  </a:lnTo>
+                  <a:lnTo>
+                    <a:pt x="6266213" y="3216509"/>
+                  </a:lnTo>
+                  <a:lnTo>
+                    <a:pt x="6189745" y="3212548"/>
+                  </a:lnTo>
+                  <a:lnTo>
+                    <a:pt x="6113277" y="3208305"/>
+                  </a:lnTo>
+                  <a:lnTo>
+                    <a:pt x="6036808" y="3203760"/>
+                  </a:lnTo>
+                  <a:lnTo>
+                    <a:pt x="5960340" y="3198890"/>
+                  </a:lnTo>
+                  <a:lnTo>
+                    <a:pt x="5883871" y="3193672"/>
+                  </a:lnTo>
+                  <a:lnTo>
+                    <a:pt x="5807403" y="3188082"/>
+                  </a:lnTo>
+                  <a:lnTo>
+                    <a:pt x="5730934" y="3182094"/>
+                  </a:lnTo>
+                  <a:lnTo>
+                    <a:pt x="5654466" y="3175678"/>
+                  </a:lnTo>
+                  <a:lnTo>
+                    <a:pt x="5577998" y="3168804"/>
+                  </a:lnTo>
+                  <a:lnTo>
+                    <a:pt x="5501529" y="3161440"/>
+                  </a:lnTo>
+                  <a:lnTo>
+                    <a:pt x="5425061" y="3153551"/>
+                  </a:lnTo>
+                  <a:lnTo>
+                    <a:pt x="5348592" y="3145098"/>
+                  </a:lnTo>
+                  <a:lnTo>
+                    <a:pt x="5272124" y="3136042"/>
+                  </a:lnTo>
+                  <a:lnTo>
+                    <a:pt x="5195655" y="3126341"/>
+                  </a:lnTo>
+                  <a:lnTo>
+                    <a:pt x="5119187" y="3115947"/>
+                  </a:lnTo>
+                  <a:lnTo>
+                    <a:pt x="5042719" y="3104811"/>
+                  </a:lnTo>
+                  <a:lnTo>
+                    <a:pt x="4966250" y="3092881"/>
+                  </a:lnTo>
+                  <a:lnTo>
+                    <a:pt x="4889782" y="3080100"/>
+                  </a:lnTo>
+                  <a:lnTo>
+                    <a:pt x="4813313" y="3066407"/>
+                  </a:lnTo>
+                  <a:lnTo>
+                    <a:pt x="4736845" y="3051736"/>
+                  </a:lnTo>
+                  <a:lnTo>
+                    <a:pt x="4660376" y="3036019"/>
+                  </a:lnTo>
+                  <a:lnTo>
+                    <a:pt x="4583908" y="3019181"/>
+                  </a:lnTo>
+                  <a:lnTo>
+                    <a:pt x="4507439" y="3001141"/>
+                  </a:lnTo>
+                  <a:lnTo>
+                    <a:pt x="4430971" y="2981814"/>
+                  </a:lnTo>
+                  <a:lnTo>
+                    <a:pt x="4354503" y="2961108"/>
+                  </a:lnTo>
+                  <a:lnTo>
+                    <a:pt x="4278034" y="2938925"/>
+                  </a:lnTo>
+                  <a:lnTo>
+                    <a:pt x="4201566" y="2915158"/>
+                  </a:lnTo>
+                  <a:lnTo>
+                    <a:pt x="4125097" y="2889696"/>
+                  </a:lnTo>
+                  <a:lnTo>
+                    <a:pt x="4048629" y="2862418"/>
+                  </a:lnTo>
+                  <a:lnTo>
+                    <a:pt x="3972160" y="2833193"/>
+                  </a:lnTo>
+                  <a:lnTo>
+                    <a:pt x="3895692" y="2801882"/>
+                  </a:lnTo>
+                  <a:lnTo>
+                    <a:pt x="3819224" y="2768338"/>
+                  </a:lnTo>
+                  <a:lnTo>
+                    <a:pt x="3742755" y="2732400"/>
+                  </a:lnTo>
+                  <a:lnTo>
+                    <a:pt x="3666287" y="2693898"/>
+                  </a:lnTo>
+                  <a:lnTo>
+                    <a:pt x="3589818" y="2652649"/>
+                  </a:lnTo>
+                  <a:lnTo>
+                    <a:pt x="3513350" y="2608457"/>
+                  </a:lnTo>
+                  <a:lnTo>
+                    <a:pt x="3436881" y="2561112"/>
+                  </a:lnTo>
+                  <a:lnTo>
+                    <a:pt x="3360413" y="2510388"/>
+                  </a:lnTo>
+                  <a:lnTo>
+                    <a:pt x="3283945" y="2497011"/>
+                  </a:lnTo>
+                  <a:lnTo>
+                    <a:pt x="3207476" y="2502997"/>
+                  </a:lnTo>
+                  <a:lnTo>
+                    <a:pt x="3131008" y="2508937"/>
+                  </a:lnTo>
+                  <a:lnTo>
+                    <a:pt x="3054539" y="2514831"/>
+                  </a:lnTo>
+                  <a:lnTo>
+                    <a:pt x="2978071" y="2520680"/>
+                  </a:lnTo>
+                  <a:lnTo>
+                    <a:pt x="2901602" y="2526483"/>
+                  </a:lnTo>
+                  <a:lnTo>
+                    <a:pt x="2825134" y="2532242"/>
+                  </a:lnTo>
+                  <a:lnTo>
+                    <a:pt x="2748666" y="2537956"/>
+                  </a:lnTo>
+                  <a:lnTo>
+                    <a:pt x="2672197" y="2543626"/>
+                  </a:lnTo>
+                  <a:lnTo>
+                    <a:pt x="2595729" y="2549252"/>
+                  </a:lnTo>
+                  <a:lnTo>
+                    <a:pt x="2519260" y="2554835"/>
+                  </a:lnTo>
+                  <a:lnTo>
+                    <a:pt x="2442792" y="2560374"/>
+                  </a:lnTo>
+                  <a:lnTo>
+                    <a:pt x="2366323" y="2565871"/>
+                  </a:lnTo>
+                  <a:lnTo>
+                    <a:pt x="2289855" y="2571326"/>
+                  </a:lnTo>
+                  <a:lnTo>
+                    <a:pt x="2213386" y="2576738"/>
+                  </a:lnTo>
+                  <a:lnTo>
+                    <a:pt x="2136918" y="2582108"/>
+                  </a:lnTo>
+                  <a:lnTo>
+                    <a:pt x="2060450" y="2587437"/>
+                  </a:lnTo>
+                  <a:lnTo>
+                    <a:pt x="1983981" y="2592725"/>
+                  </a:lnTo>
+                  <a:lnTo>
+                    <a:pt x="1907513" y="2597972"/>
+                  </a:lnTo>
+                  <a:lnTo>
+                    <a:pt x="1831044" y="2603178"/>
+                  </a:lnTo>
+                  <a:lnTo>
+                    <a:pt x="1754576" y="2608345"/>
+                  </a:lnTo>
+                  <a:lnTo>
+                    <a:pt x="1678107" y="2613471"/>
+                  </a:lnTo>
+                  <a:lnTo>
+                    <a:pt x="1601639" y="2618558"/>
+                  </a:lnTo>
+                  <a:lnTo>
+                    <a:pt x="1525171" y="2623605"/>
+                  </a:lnTo>
+                  <a:lnTo>
+                    <a:pt x="1448702" y="2628614"/>
+                  </a:lnTo>
+                  <a:lnTo>
+                    <a:pt x="1372234" y="2633583"/>
+                  </a:lnTo>
+                  <a:lnTo>
+                    <a:pt x="1295765" y="2638515"/>
+                  </a:lnTo>
+                  <a:lnTo>
+                    <a:pt x="1219297" y="2643408"/>
+                  </a:lnTo>
+                  <a:lnTo>
+                    <a:pt x="1142828" y="2648263"/>
+                  </a:lnTo>
+                  <a:lnTo>
+                    <a:pt x="1066360" y="2653081"/>
+                  </a:lnTo>
+                  <a:lnTo>
+                    <a:pt x="989892" y="2657862"/>
+                  </a:lnTo>
+                  <a:lnTo>
+                    <a:pt x="913423" y="2662606"/>
+                  </a:lnTo>
+                  <a:lnTo>
+                    <a:pt x="836955" y="2667313"/>
+                  </a:lnTo>
+                  <a:lnTo>
+                    <a:pt x="760486" y="2671984"/>
+                  </a:lnTo>
+                  <a:lnTo>
+                    <a:pt x="684018" y="2676619"/>
+                  </a:lnTo>
+                  <a:lnTo>
+                    <a:pt x="607549" y="2681218"/>
+                  </a:lnTo>
+                  <a:lnTo>
+                    <a:pt x="531081" y="2685781"/>
+                  </a:lnTo>
+                  <a:lnTo>
+                    <a:pt x="454613" y="2690309"/>
+                  </a:lnTo>
+                  <a:lnTo>
+                    <a:pt x="378144" y="2694802"/>
+                  </a:lnTo>
+                  <a:lnTo>
+                    <a:pt x="301676" y="2699261"/>
+                  </a:lnTo>
+                  <a:lnTo>
+                    <a:pt x="225207" y="2703685"/>
+                  </a:lnTo>
+                  <a:lnTo>
+                    <a:pt x="148739" y="2708075"/>
+                  </a:lnTo>
+                  <a:lnTo>
+                    <a:pt x="72270" y="2712431"/>
+                  </a:lnTo>
+                  <a:lnTo>
+                    <a:pt x="0" y="2716516"/>
                   </a:lnTo>
                   <a:close/>
                 </a:path>
@@ -3537,240 +3924,240 @@
         </p:sp>
         <p:sp>
           <p:nvSpPr>
-            <p:cNvPr id="22" name="pl22"/>
+            <p:cNvPr id="31" name="pl31"/>
             <p:cNvSpPr/>
             <p:nvPr/>
           </p:nvSpPr>
           <p:spPr>
             <a:xfrm>
-              <a:off x="2659041" y="2209169"/>
-              <a:ext cx="5516906" cy="2444862"/>
+              <a:off x="2659041" y="2185486"/>
+              <a:ext cx="5516906" cy="2490978"/>
             </a:xfrm>
             <a:custGeom>
               <a:avLst/>
               <a:pathLst>
-                <a:path w="5516906" h="2444862">
+                <a:path w="5516906" h="2490978">
                   <a:moveTo>
                     <a:pt x="0" y="0"/>
                   </a:moveTo>
                   <a:lnTo>
-                    <a:pt x="11179" y="33153"/>
-                  </a:lnTo>
-                  <a:lnTo>
-                    <a:pt x="87647" y="244824"/>
-                  </a:lnTo>
-                  <a:lnTo>
-                    <a:pt x="164116" y="442398"/>
-                  </a:lnTo>
-                  <a:lnTo>
-                    <a:pt x="240584" y="626813"/>
-                  </a:lnTo>
-                  <a:lnTo>
-                    <a:pt x="317053" y="798947"/>
-                  </a:lnTo>
-                  <a:lnTo>
-                    <a:pt x="393521" y="959616"/>
-                  </a:lnTo>
-                  <a:lnTo>
-                    <a:pt x="469990" y="1109586"/>
-                  </a:lnTo>
-                  <a:lnTo>
-                    <a:pt x="546458" y="1249567"/>
-                  </a:lnTo>
-                  <a:lnTo>
-                    <a:pt x="622926" y="1380226"/>
-                  </a:lnTo>
-                  <a:lnTo>
-                    <a:pt x="699395" y="1502183"/>
-                  </a:lnTo>
-                  <a:lnTo>
-                    <a:pt x="775863" y="1616018"/>
-                  </a:lnTo>
-                  <a:lnTo>
-                    <a:pt x="852332" y="1722271"/>
-                  </a:lnTo>
-                  <a:lnTo>
-                    <a:pt x="928800" y="1821448"/>
-                  </a:lnTo>
-                  <a:lnTo>
-                    <a:pt x="1005269" y="1914020"/>
-                  </a:lnTo>
-                  <a:lnTo>
-                    <a:pt x="1081737" y="2000427"/>
-                  </a:lnTo>
-                  <a:lnTo>
-                    <a:pt x="1158205" y="2081079"/>
-                  </a:lnTo>
-                  <a:lnTo>
-                    <a:pt x="1234674" y="2156360"/>
-                  </a:lnTo>
-                  <a:lnTo>
-                    <a:pt x="1311142" y="2226627"/>
-                  </a:lnTo>
-                  <a:lnTo>
-                    <a:pt x="1387611" y="2292215"/>
-                  </a:lnTo>
-                  <a:lnTo>
-                    <a:pt x="1464079" y="2353434"/>
-                  </a:lnTo>
-                  <a:lnTo>
-                    <a:pt x="1540548" y="2410577"/>
-                  </a:lnTo>
-                  <a:lnTo>
-                    <a:pt x="1617016" y="2444862"/>
-                  </a:lnTo>
-                  <a:lnTo>
-                    <a:pt x="1693485" y="2438895"/>
-                  </a:lnTo>
-                  <a:lnTo>
-                    <a:pt x="1769953" y="2432881"/>
-                  </a:lnTo>
-                  <a:lnTo>
-                    <a:pt x="1846421" y="2426821"/>
-                  </a:lnTo>
-                  <a:lnTo>
-                    <a:pt x="1922890" y="2420713"/>
-                  </a:lnTo>
-                  <a:lnTo>
-                    <a:pt x="1999358" y="2414558"/>
-                  </a:lnTo>
-                  <a:lnTo>
-                    <a:pt x="2075827" y="2408354"/>
-                  </a:lnTo>
-                  <a:lnTo>
-                    <a:pt x="2152295" y="2402103"/>
-                  </a:lnTo>
-                  <a:lnTo>
-                    <a:pt x="2228764" y="2395803"/>
-                  </a:lnTo>
-                  <a:lnTo>
-                    <a:pt x="2305232" y="2389454"/>
-                  </a:lnTo>
-                  <a:lnTo>
-                    <a:pt x="2381700" y="2383055"/>
-                  </a:lnTo>
-                  <a:lnTo>
-                    <a:pt x="2458169" y="2376607"/>
-                  </a:lnTo>
-                  <a:lnTo>
-                    <a:pt x="2534637" y="2370108"/>
-                  </a:lnTo>
-                  <a:lnTo>
-                    <a:pt x="2611106" y="2363559"/>
-                  </a:lnTo>
-                  <a:lnTo>
-                    <a:pt x="2687574" y="2356959"/>
-                  </a:lnTo>
-                  <a:lnTo>
-                    <a:pt x="2764043" y="2350307"/>
-                  </a:lnTo>
-                  <a:lnTo>
-                    <a:pt x="2840511" y="2343604"/>
-                  </a:lnTo>
-                  <a:lnTo>
-                    <a:pt x="2916979" y="2336848"/>
-                  </a:lnTo>
-                  <a:lnTo>
-                    <a:pt x="2993448" y="2330040"/>
-                  </a:lnTo>
-                  <a:lnTo>
-                    <a:pt x="3069916" y="2323179"/>
-                  </a:lnTo>
-                  <a:lnTo>
-                    <a:pt x="3146385" y="2316265"/>
-                  </a:lnTo>
-                  <a:lnTo>
-                    <a:pt x="3222853" y="2309296"/>
-                  </a:lnTo>
-                  <a:lnTo>
-                    <a:pt x="3299322" y="2302274"/>
-                  </a:lnTo>
-                  <a:lnTo>
-                    <a:pt x="3375790" y="2295197"/>
-                  </a:lnTo>
-                  <a:lnTo>
-                    <a:pt x="3452258" y="2288064"/>
-                  </a:lnTo>
-                  <a:lnTo>
-                    <a:pt x="3528727" y="2280876"/>
-                  </a:lnTo>
-                  <a:lnTo>
-                    <a:pt x="3605195" y="2273633"/>
-                  </a:lnTo>
-                  <a:lnTo>
-                    <a:pt x="3681664" y="2266333"/>
-                  </a:lnTo>
-                  <a:lnTo>
-                    <a:pt x="3758132" y="2258976"/>
-                  </a:lnTo>
-                  <a:lnTo>
-                    <a:pt x="3834601" y="2251561"/>
-                  </a:lnTo>
-                  <a:lnTo>
-                    <a:pt x="3911069" y="2244089"/>
-                  </a:lnTo>
-                  <a:lnTo>
-                    <a:pt x="3987538" y="2236559"/>
-                  </a:lnTo>
-                  <a:lnTo>
-                    <a:pt x="4064006" y="2228970"/>
-                  </a:lnTo>
-                  <a:lnTo>
-                    <a:pt x="4140474" y="2221322"/>
-                  </a:lnTo>
-                  <a:lnTo>
-                    <a:pt x="4216943" y="2213615"/>
-                  </a:lnTo>
-                  <a:lnTo>
-                    <a:pt x="4293411" y="2205848"/>
-                  </a:lnTo>
-                  <a:lnTo>
-                    <a:pt x="4369880" y="2198020"/>
-                  </a:lnTo>
-                  <a:lnTo>
-                    <a:pt x="4446348" y="2190131"/>
-                  </a:lnTo>
-                  <a:lnTo>
-                    <a:pt x="4522817" y="2182181"/>
-                  </a:lnTo>
-                  <a:lnTo>
-                    <a:pt x="4599285" y="2174169"/>
-                  </a:lnTo>
-                  <a:lnTo>
-                    <a:pt x="4675753" y="2166094"/>
-                  </a:lnTo>
-                  <a:lnTo>
-                    <a:pt x="4752222" y="2157957"/>
-                  </a:lnTo>
-                  <a:lnTo>
-                    <a:pt x="4828690" y="2149757"/>
-                  </a:lnTo>
-                  <a:lnTo>
-                    <a:pt x="4905159" y="2141492"/>
-                  </a:lnTo>
-                  <a:lnTo>
-                    <a:pt x="4981627" y="2133163"/>
-                  </a:lnTo>
-                  <a:lnTo>
-                    <a:pt x="5058096" y="2124770"/>
-                  </a:lnTo>
-                  <a:lnTo>
-                    <a:pt x="5134564" y="2116311"/>
-                  </a:lnTo>
-                  <a:lnTo>
-                    <a:pt x="5211032" y="2107786"/>
-                  </a:lnTo>
-                  <a:lnTo>
-                    <a:pt x="5287501" y="2099195"/>
-                  </a:lnTo>
-                  <a:lnTo>
-                    <a:pt x="5363969" y="2090537"/>
-                  </a:lnTo>
-                  <a:lnTo>
-                    <a:pt x="5440438" y="2081811"/>
-                  </a:lnTo>
-                  <a:lnTo>
-                    <a:pt x="5516906" y="2073018"/>
+                    <a:pt x="11179" y="33779"/>
+                  </a:lnTo>
+                  <a:lnTo>
+                    <a:pt x="87647" y="249442"/>
+                  </a:lnTo>
+                  <a:lnTo>
+                    <a:pt x="164116" y="450742"/>
+                  </a:lnTo>
+                  <a:lnTo>
+                    <a:pt x="240584" y="638636"/>
+                  </a:lnTo>
+                  <a:lnTo>
+                    <a:pt x="317053" y="814017"/>
+                  </a:lnTo>
+                  <a:lnTo>
+                    <a:pt x="393521" y="977717"/>
+                  </a:lnTo>
+                  <a:lnTo>
+                    <a:pt x="469990" y="1130515"/>
+                  </a:lnTo>
+                  <a:lnTo>
+                    <a:pt x="546458" y="1273137"/>
+                  </a:lnTo>
+                  <a:lnTo>
+                    <a:pt x="622926" y="1406260"/>
+                  </a:lnTo>
+                  <a:lnTo>
+                    <a:pt x="699395" y="1530517"/>
+                  </a:lnTo>
+                  <a:lnTo>
+                    <a:pt x="775863" y="1646499"/>
+                  </a:lnTo>
+                  <a:lnTo>
+                    <a:pt x="852332" y="1754757"/>
+                  </a:lnTo>
+                  <a:lnTo>
+                    <a:pt x="928800" y="1855805"/>
+                  </a:lnTo>
+                  <a:lnTo>
+                    <a:pt x="1005269" y="1950123"/>
+                  </a:lnTo>
+                  <a:lnTo>
+                    <a:pt x="1081737" y="2038160"/>
+                  </a:lnTo>
+                  <a:lnTo>
+                    <a:pt x="1158205" y="2120333"/>
+                  </a:lnTo>
+                  <a:lnTo>
+                    <a:pt x="1234674" y="2197034"/>
+                  </a:lnTo>
+                  <a:lnTo>
+                    <a:pt x="1311142" y="2268626"/>
+                  </a:lnTo>
+                  <a:lnTo>
+                    <a:pt x="1387611" y="2335451"/>
+                  </a:lnTo>
+                  <a:lnTo>
+                    <a:pt x="1464079" y="2397825"/>
+                  </a:lnTo>
+                  <a:lnTo>
+                    <a:pt x="1540548" y="2456045"/>
+                  </a:lnTo>
+                  <a:lnTo>
+                    <a:pt x="1617016" y="2490978"/>
+                  </a:lnTo>
+                  <a:lnTo>
+                    <a:pt x="1693485" y="2484898"/>
+                  </a:lnTo>
+                  <a:lnTo>
+                    <a:pt x="1769953" y="2478771"/>
+                  </a:lnTo>
+                  <a:lnTo>
+                    <a:pt x="1846421" y="2472596"/>
+                  </a:lnTo>
+                  <a:lnTo>
+                    <a:pt x="1922890" y="2466373"/>
+                  </a:lnTo>
+                  <a:lnTo>
+                    <a:pt x="1999358" y="2460102"/>
+                  </a:lnTo>
+                  <a:lnTo>
+                    <a:pt x="2075827" y="2453781"/>
+                  </a:lnTo>
+                  <a:lnTo>
+                    <a:pt x="2152295" y="2447412"/>
+                  </a:lnTo>
+                  <a:lnTo>
+                    <a:pt x="2228764" y="2440993"/>
+                  </a:lnTo>
+                  <a:lnTo>
+                    <a:pt x="2305232" y="2434524"/>
+                  </a:lnTo>
+                  <a:lnTo>
+                    <a:pt x="2381700" y="2428005"/>
+                  </a:lnTo>
+                  <a:lnTo>
+                    <a:pt x="2458169" y="2421435"/>
+                  </a:lnTo>
+                  <a:lnTo>
+                    <a:pt x="2534637" y="2414814"/>
+                  </a:lnTo>
+                  <a:lnTo>
+                    <a:pt x="2611106" y="2408141"/>
+                  </a:lnTo>
+                  <a:lnTo>
+                    <a:pt x="2687574" y="2401416"/>
+                  </a:lnTo>
+                  <a:lnTo>
+                    <a:pt x="2764043" y="2394639"/>
+                  </a:lnTo>
+                  <a:lnTo>
+                    <a:pt x="2840511" y="2387809"/>
+                  </a:lnTo>
+                  <a:lnTo>
+                    <a:pt x="2916979" y="2380927"/>
+                  </a:lnTo>
+                  <a:lnTo>
+                    <a:pt x="2993448" y="2373990"/>
+                  </a:lnTo>
+                  <a:lnTo>
+                    <a:pt x="3069916" y="2367000"/>
+                  </a:lnTo>
+                  <a:lnTo>
+                    <a:pt x="3146385" y="2359955"/>
+                  </a:lnTo>
+                  <a:lnTo>
+                    <a:pt x="3222853" y="2352855"/>
+                  </a:lnTo>
+                  <a:lnTo>
+                    <a:pt x="3299322" y="2345700"/>
+                  </a:lnTo>
+                  <a:lnTo>
+                    <a:pt x="3375790" y="2338489"/>
+                  </a:lnTo>
+                  <a:lnTo>
+                    <a:pt x="3452258" y="2331222"/>
+                  </a:lnTo>
+                  <a:lnTo>
+                    <a:pt x="3528727" y="2323899"/>
+                  </a:lnTo>
+                  <a:lnTo>
+                    <a:pt x="3605195" y="2316518"/>
+                  </a:lnTo>
+                  <a:lnTo>
+                    <a:pt x="3681664" y="2309081"/>
+                  </a:lnTo>
+                  <a:lnTo>
+                    <a:pt x="3758132" y="2301585"/>
+                  </a:lnTo>
+                  <a:lnTo>
+                    <a:pt x="3834601" y="2294031"/>
+                  </a:lnTo>
+                  <a:lnTo>
+                    <a:pt x="3911069" y="2286418"/>
+                  </a:lnTo>
+                  <a:lnTo>
+                    <a:pt x="3987538" y="2278746"/>
+                  </a:lnTo>
+                  <a:lnTo>
+                    <a:pt x="4064006" y="2271014"/>
+                  </a:lnTo>
+                  <a:lnTo>
+                    <a:pt x="4140474" y="2263222"/>
+                  </a:lnTo>
+                  <a:lnTo>
+                    <a:pt x="4216943" y="2255369"/>
+                  </a:lnTo>
+                  <a:lnTo>
+                    <a:pt x="4293411" y="2247455"/>
+                  </a:lnTo>
+                  <a:lnTo>
+                    <a:pt x="4369880" y="2239479"/>
+                  </a:lnTo>
+                  <a:lnTo>
+                    <a:pt x="4446348" y="2231442"/>
+                  </a:lnTo>
+                  <a:lnTo>
+                    <a:pt x="4522817" y="2223342"/>
+                  </a:lnTo>
+                  <a:lnTo>
+                    <a:pt x="4599285" y="2215178"/>
+                  </a:lnTo>
+                  <a:lnTo>
+                    <a:pt x="4675753" y="2206952"/>
+                  </a:lnTo>
+                  <a:lnTo>
+                    <a:pt x="4752222" y="2198661"/>
+                  </a:lnTo>
+                  <a:lnTo>
+                    <a:pt x="4828690" y="2190306"/>
+                  </a:lnTo>
+                  <a:lnTo>
+                    <a:pt x="4905159" y="2181885"/>
+                  </a:lnTo>
+                  <a:lnTo>
+                    <a:pt x="4981627" y="2173399"/>
+                  </a:lnTo>
+                  <a:lnTo>
+                    <a:pt x="5058096" y="2164847"/>
+                  </a:lnTo>
+                  <a:lnTo>
+                    <a:pt x="5134564" y="2156229"/>
+                  </a:lnTo>
+                  <a:lnTo>
+                    <a:pt x="5211032" y="2147543"/>
+                  </a:lnTo>
+                  <a:lnTo>
+                    <a:pt x="5287501" y="2138790"/>
+                  </a:lnTo>
+                  <a:lnTo>
+                    <a:pt x="5363969" y="2129969"/>
+                  </a:lnTo>
+                  <a:lnTo>
+                    <a:pt x="5440438" y="2121079"/>
+                  </a:lnTo>
+                  <a:lnTo>
+                    <a:pt x="5516906" y="2112119"/>
                   </a:lnTo>
                 </a:path>
               </a:pathLst>
@@ -3784,306 +4171,306 @@
         </p:sp>
         <p:sp>
           <p:nvSpPr>
-            <p:cNvPr id="23" name="pl23"/>
+            <p:cNvPr id="32" name="pl32"/>
             <p:cNvSpPr/>
             <p:nvPr/>
           </p:nvSpPr>
           <p:spPr>
             <a:xfrm>
-              <a:off x="915645" y="4659953"/>
-              <a:ext cx="7260303" cy="738417"/>
+              <a:off x="915645" y="4682497"/>
+              <a:ext cx="7260303" cy="752345"/>
             </a:xfrm>
             <a:custGeom>
               <a:avLst/>
               <a:pathLst>
-                <a:path w="7260303" h="738417">
+                <a:path w="7260303" h="752345">
                   <a:moveTo>
-                    <a:pt x="7260303" y="738417"/>
+                    <a:pt x="7260303" y="752345"/>
                   </a:moveTo>
                   <a:lnTo>
-                    <a:pt x="7183835" y="736830"/>
-                  </a:lnTo>
-                  <a:lnTo>
-                    <a:pt x="7107366" y="735130"/>
-                  </a:lnTo>
-                  <a:lnTo>
-                    <a:pt x="7030898" y="733309"/>
-                  </a:lnTo>
-                  <a:lnTo>
-                    <a:pt x="6954429" y="731358"/>
-                  </a:lnTo>
-                  <a:lnTo>
-                    <a:pt x="6877961" y="729267"/>
-                  </a:lnTo>
-                  <a:lnTo>
-                    <a:pt x="6801492" y="727028"/>
-                  </a:lnTo>
-                  <a:lnTo>
-                    <a:pt x="6725024" y="724628"/>
-                  </a:lnTo>
-                  <a:lnTo>
-                    <a:pt x="6648556" y="722058"/>
-                  </a:lnTo>
-                  <a:lnTo>
-                    <a:pt x="6572087" y="719304"/>
-                  </a:lnTo>
-                  <a:lnTo>
-                    <a:pt x="6495619" y="716353"/>
-                  </a:lnTo>
-                  <a:lnTo>
-                    <a:pt x="6419150" y="713192"/>
-                  </a:lnTo>
-                  <a:lnTo>
-                    <a:pt x="6342682" y="709806"/>
-                  </a:lnTo>
-                  <a:lnTo>
-                    <a:pt x="6266213" y="706177"/>
-                  </a:lnTo>
-                  <a:lnTo>
-                    <a:pt x="6189745" y="702290"/>
-                  </a:lnTo>
-                  <a:lnTo>
-                    <a:pt x="6113277" y="698126"/>
-                  </a:lnTo>
-                  <a:lnTo>
-                    <a:pt x="6036808" y="693665"/>
-                  </a:lnTo>
-                  <a:lnTo>
-                    <a:pt x="5960340" y="688885"/>
-                  </a:lnTo>
-                  <a:lnTo>
-                    <a:pt x="5883871" y="683764"/>
-                  </a:lnTo>
-                  <a:lnTo>
-                    <a:pt x="5807403" y="678278"/>
-                  </a:lnTo>
-                  <a:lnTo>
-                    <a:pt x="5730934" y="672400"/>
-                  </a:lnTo>
-                  <a:lnTo>
-                    <a:pt x="5654466" y="666103"/>
-                  </a:lnTo>
-                  <a:lnTo>
-                    <a:pt x="5577998" y="659356"/>
-                  </a:lnTo>
-                  <a:lnTo>
-                    <a:pt x="5501529" y="652128"/>
-                  </a:lnTo>
-                  <a:lnTo>
-                    <a:pt x="5425061" y="644385"/>
-                  </a:lnTo>
-                  <a:lnTo>
-                    <a:pt x="5348592" y="636089"/>
-                  </a:lnTo>
-                  <a:lnTo>
-                    <a:pt x="5272124" y="627201"/>
-                  </a:lnTo>
-                  <a:lnTo>
-                    <a:pt x="5195655" y="617679"/>
-                  </a:lnTo>
-                  <a:lnTo>
-                    <a:pt x="5119187" y="607477"/>
-                  </a:lnTo>
-                  <a:lnTo>
-                    <a:pt x="5042719" y="596548"/>
-                  </a:lnTo>
-                  <a:lnTo>
-                    <a:pt x="4966250" y="584839"/>
-                  </a:lnTo>
-                  <a:lnTo>
-                    <a:pt x="4889782" y="572294"/>
-                  </a:lnTo>
-                  <a:lnTo>
-                    <a:pt x="4813313" y="558854"/>
-                  </a:lnTo>
-                  <a:lnTo>
-                    <a:pt x="4736845" y="544456"/>
-                  </a:lnTo>
-                  <a:lnTo>
-                    <a:pt x="4660376" y="529030"/>
-                  </a:lnTo>
-                  <a:lnTo>
-                    <a:pt x="4583908" y="512503"/>
-                  </a:lnTo>
-                  <a:lnTo>
-                    <a:pt x="4507439" y="494797"/>
-                  </a:lnTo>
-                  <a:lnTo>
-                    <a:pt x="4430971" y="475828"/>
-                  </a:lnTo>
-                  <a:lnTo>
-                    <a:pt x="4354503" y="455505"/>
-                  </a:lnTo>
-                  <a:lnTo>
-                    <a:pt x="4278034" y="433732"/>
-                  </a:lnTo>
-                  <a:lnTo>
-                    <a:pt x="4201566" y="410406"/>
-                  </a:lnTo>
-                  <a:lnTo>
-                    <a:pt x="4125097" y="385416"/>
-                  </a:lnTo>
-                  <a:lnTo>
-                    <a:pt x="4048629" y="358642"/>
-                  </a:lnTo>
-                  <a:lnTo>
-                    <a:pt x="3972160" y="329958"/>
-                  </a:lnTo>
-                  <a:lnTo>
-                    <a:pt x="3895692" y="299227"/>
-                  </a:lnTo>
-                  <a:lnTo>
-                    <a:pt x="3819224" y="266304"/>
-                  </a:lnTo>
-                  <a:lnTo>
-                    <a:pt x="3742755" y="231032"/>
-                  </a:lnTo>
-                  <a:lnTo>
-                    <a:pt x="3666287" y="193242"/>
-                  </a:lnTo>
-                  <a:lnTo>
-                    <a:pt x="3589818" y="152757"/>
-                  </a:lnTo>
-                  <a:lnTo>
-                    <a:pt x="3513350" y="109383"/>
-                  </a:lnTo>
-                  <a:lnTo>
-                    <a:pt x="3436881" y="62914"/>
-                  </a:lnTo>
-                  <a:lnTo>
-                    <a:pt x="3360413" y="13129"/>
+                    <a:pt x="7183835" y="750728"/>
+                  </a:lnTo>
+                  <a:lnTo>
+                    <a:pt x="7107366" y="748996"/>
+                  </a:lnTo>
+                  <a:lnTo>
+                    <a:pt x="7030898" y="747141"/>
+                  </a:lnTo>
+                  <a:lnTo>
+                    <a:pt x="6954429" y="745153"/>
+                  </a:lnTo>
+                  <a:lnTo>
+                    <a:pt x="6877961" y="743023"/>
+                  </a:lnTo>
+                  <a:lnTo>
+                    <a:pt x="6801492" y="740741"/>
+                  </a:lnTo>
+                  <a:lnTo>
+                    <a:pt x="6725024" y="738296"/>
+                  </a:lnTo>
+                  <a:lnTo>
+                    <a:pt x="6648556" y="735677"/>
+                  </a:lnTo>
+                  <a:lnTo>
+                    <a:pt x="6572087" y="732871"/>
+                  </a:lnTo>
+                  <a:lnTo>
+                    <a:pt x="6495619" y="729865"/>
+                  </a:lnTo>
+                  <a:lnTo>
+                    <a:pt x="6419150" y="726645"/>
+                  </a:lnTo>
+                  <a:lnTo>
+                    <a:pt x="6342682" y="723194"/>
+                  </a:lnTo>
+                  <a:lnTo>
+                    <a:pt x="6266213" y="719498"/>
+                  </a:lnTo>
+                  <a:lnTo>
+                    <a:pt x="6189745" y="715537"/>
+                  </a:lnTo>
+                  <a:lnTo>
+                    <a:pt x="6113277" y="711294"/>
+                  </a:lnTo>
+                  <a:lnTo>
+                    <a:pt x="6036808" y="706749"/>
+                  </a:lnTo>
+                  <a:lnTo>
+                    <a:pt x="5960340" y="701879"/>
+                  </a:lnTo>
+                  <a:lnTo>
+                    <a:pt x="5883871" y="696661"/>
+                  </a:lnTo>
+                  <a:lnTo>
+                    <a:pt x="5807403" y="691071"/>
+                  </a:lnTo>
+                  <a:lnTo>
+                    <a:pt x="5730934" y="685083"/>
+                  </a:lnTo>
+                  <a:lnTo>
+                    <a:pt x="5654466" y="678667"/>
+                  </a:lnTo>
+                  <a:lnTo>
+                    <a:pt x="5577998" y="671793"/>
+                  </a:lnTo>
+                  <a:lnTo>
+                    <a:pt x="5501529" y="664429"/>
+                  </a:lnTo>
+                  <a:lnTo>
+                    <a:pt x="5425061" y="656539"/>
+                  </a:lnTo>
+                  <a:lnTo>
+                    <a:pt x="5348592" y="648087"/>
+                  </a:lnTo>
+                  <a:lnTo>
+                    <a:pt x="5272124" y="639031"/>
+                  </a:lnTo>
+                  <a:lnTo>
+                    <a:pt x="5195655" y="629330"/>
+                  </a:lnTo>
+                  <a:lnTo>
+                    <a:pt x="5119187" y="618936"/>
+                  </a:lnTo>
+                  <a:lnTo>
+                    <a:pt x="5042719" y="607800"/>
+                  </a:lnTo>
+                  <a:lnTo>
+                    <a:pt x="4966250" y="595870"/>
+                  </a:lnTo>
+                  <a:lnTo>
+                    <a:pt x="4889782" y="583089"/>
+                  </a:lnTo>
+                  <a:lnTo>
+                    <a:pt x="4813313" y="569396"/>
+                  </a:lnTo>
+                  <a:lnTo>
+                    <a:pt x="4736845" y="554725"/>
+                  </a:lnTo>
+                  <a:lnTo>
+                    <a:pt x="4660376" y="539008"/>
+                  </a:lnTo>
+                  <a:lnTo>
+                    <a:pt x="4583908" y="522170"/>
+                  </a:lnTo>
+                  <a:lnTo>
+                    <a:pt x="4507439" y="504130"/>
+                  </a:lnTo>
+                  <a:lnTo>
+                    <a:pt x="4430971" y="484803"/>
+                  </a:lnTo>
+                  <a:lnTo>
+                    <a:pt x="4354503" y="464097"/>
+                  </a:lnTo>
+                  <a:lnTo>
+                    <a:pt x="4278034" y="441914"/>
+                  </a:lnTo>
+                  <a:lnTo>
+                    <a:pt x="4201566" y="418147"/>
+                  </a:lnTo>
+                  <a:lnTo>
+                    <a:pt x="4125097" y="392685"/>
+                  </a:lnTo>
+                  <a:lnTo>
+                    <a:pt x="4048629" y="365407"/>
+                  </a:lnTo>
+                  <a:lnTo>
+                    <a:pt x="3972160" y="336182"/>
+                  </a:lnTo>
+                  <a:lnTo>
+                    <a:pt x="3895692" y="304871"/>
+                  </a:lnTo>
+                  <a:lnTo>
+                    <a:pt x="3819224" y="271327"/>
+                  </a:lnTo>
+                  <a:lnTo>
+                    <a:pt x="3742755" y="235389"/>
+                  </a:lnTo>
+                  <a:lnTo>
+                    <a:pt x="3666287" y="196887"/>
+                  </a:lnTo>
+                  <a:lnTo>
+                    <a:pt x="3589818" y="155638"/>
+                  </a:lnTo>
+                  <a:lnTo>
+                    <a:pt x="3513350" y="111446"/>
+                  </a:lnTo>
+                  <a:lnTo>
+                    <a:pt x="3436881" y="64101"/>
+                  </a:lnTo>
+                  <a:lnTo>
+                    <a:pt x="3360413" y="13377"/>
                   </a:lnTo>
                   <a:lnTo>
                     <a:pt x="3283945" y="0"/>
                   </a:lnTo>
                   <a:lnTo>
-                    <a:pt x="3207476" y="5875"/>
-                  </a:lnTo>
-                  <a:lnTo>
-                    <a:pt x="3131008" y="11705"/>
-                  </a:lnTo>
-                  <a:lnTo>
-                    <a:pt x="3054539" y="17490"/>
-                  </a:lnTo>
-                  <a:lnTo>
-                    <a:pt x="2978071" y="23230"/>
-                  </a:lnTo>
-                  <a:lnTo>
-                    <a:pt x="2901602" y="28926"/>
-                  </a:lnTo>
-                  <a:lnTo>
-                    <a:pt x="2825134" y="34578"/>
-                  </a:lnTo>
-                  <a:lnTo>
-                    <a:pt x="2748666" y="40187"/>
-                  </a:lnTo>
-                  <a:lnTo>
-                    <a:pt x="2672197" y="45752"/>
-                  </a:lnTo>
-                  <a:lnTo>
-                    <a:pt x="2595729" y="51274"/>
-                  </a:lnTo>
-                  <a:lnTo>
-                    <a:pt x="2519260" y="56753"/>
-                  </a:lnTo>
-                  <a:lnTo>
-                    <a:pt x="2442792" y="62190"/>
-                  </a:lnTo>
-                  <a:lnTo>
-                    <a:pt x="2366323" y="67585"/>
-                  </a:lnTo>
-                  <a:lnTo>
-                    <a:pt x="2289855" y="72939"/>
-                  </a:lnTo>
-                  <a:lnTo>
-                    <a:pt x="2213386" y="78251"/>
-                  </a:lnTo>
-                  <a:lnTo>
-                    <a:pt x="2136918" y="83522"/>
-                  </a:lnTo>
-                  <a:lnTo>
-                    <a:pt x="2060450" y="88752"/>
-                  </a:lnTo>
-                  <a:lnTo>
-                    <a:pt x="1983981" y="93942"/>
-                  </a:lnTo>
-                  <a:lnTo>
-                    <a:pt x="1907513" y="99092"/>
-                  </a:lnTo>
-                  <a:lnTo>
-                    <a:pt x="1831044" y="104202"/>
-                  </a:lnTo>
-                  <a:lnTo>
-                    <a:pt x="1754576" y="109272"/>
-                  </a:lnTo>
-                  <a:lnTo>
-                    <a:pt x="1678107" y="114304"/>
-                  </a:lnTo>
-                  <a:lnTo>
-                    <a:pt x="1601639" y="119296"/>
-                  </a:lnTo>
-                  <a:lnTo>
-                    <a:pt x="1525171" y="124250"/>
-                  </a:lnTo>
-                  <a:lnTo>
-                    <a:pt x="1448702" y="129166"/>
-                  </a:lnTo>
-                  <a:lnTo>
-                    <a:pt x="1372234" y="134044"/>
-                  </a:lnTo>
-                  <a:lnTo>
-                    <a:pt x="1295765" y="138884"/>
-                  </a:lnTo>
-                  <a:lnTo>
-                    <a:pt x="1219297" y="143687"/>
-                  </a:lnTo>
-                  <a:lnTo>
-                    <a:pt x="1142828" y="148452"/>
-                  </a:lnTo>
-                  <a:lnTo>
-                    <a:pt x="1066360" y="153181"/>
-                  </a:lnTo>
-                  <a:lnTo>
-                    <a:pt x="989892" y="157873"/>
-                  </a:lnTo>
-                  <a:lnTo>
-                    <a:pt x="913423" y="162529"/>
-                  </a:lnTo>
-                  <a:lnTo>
-                    <a:pt x="836955" y="167149"/>
-                  </a:lnTo>
-                  <a:lnTo>
-                    <a:pt x="760486" y="171734"/>
-                  </a:lnTo>
-                  <a:lnTo>
-                    <a:pt x="684018" y="176283"/>
-                  </a:lnTo>
-                  <a:lnTo>
-                    <a:pt x="607549" y="180796"/>
-                  </a:lnTo>
-                  <a:lnTo>
-                    <a:pt x="531081" y="185275"/>
-                  </a:lnTo>
-                  <a:lnTo>
-                    <a:pt x="454613" y="189720"/>
-                  </a:lnTo>
-                  <a:lnTo>
-                    <a:pt x="378144" y="194130"/>
-                  </a:lnTo>
-                  <a:lnTo>
-                    <a:pt x="301676" y="198506"/>
-                  </a:lnTo>
-                  <a:lnTo>
-                    <a:pt x="225207" y="202848"/>
-                  </a:lnTo>
-                  <a:lnTo>
-                    <a:pt x="148739" y="207156"/>
-                  </a:lnTo>
-                  <a:lnTo>
-                    <a:pt x="72270" y="211432"/>
-                  </a:lnTo>
-                  <a:lnTo>
-                    <a:pt x="0" y="215441"/>
+                    <a:pt x="3207476" y="5986"/>
+                  </a:lnTo>
+                  <a:lnTo>
+                    <a:pt x="3131008" y="11926"/>
+                  </a:lnTo>
+                  <a:lnTo>
+                    <a:pt x="3054539" y="17820"/>
+                  </a:lnTo>
+                  <a:lnTo>
+                    <a:pt x="2978071" y="23669"/>
+                  </a:lnTo>
+                  <a:lnTo>
+                    <a:pt x="2901602" y="29472"/>
+                  </a:lnTo>
+                  <a:lnTo>
+                    <a:pt x="2825134" y="35231"/>
+                  </a:lnTo>
+                  <a:lnTo>
+                    <a:pt x="2748666" y="40945"/>
+                  </a:lnTo>
+                  <a:lnTo>
+                    <a:pt x="2672197" y="46615"/>
+                  </a:lnTo>
+                  <a:lnTo>
+                    <a:pt x="2595729" y="52241"/>
+                  </a:lnTo>
+                  <a:lnTo>
+                    <a:pt x="2519260" y="57824"/>
+                  </a:lnTo>
+                  <a:lnTo>
+                    <a:pt x="2442792" y="63363"/>
+                  </a:lnTo>
+                  <a:lnTo>
+                    <a:pt x="2366323" y="68860"/>
+                  </a:lnTo>
+                  <a:lnTo>
+                    <a:pt x="2289855" y="74315"/>
+                  </a:lnTo>
+                  <a:lnTo>
+                    <a:pt x="2213386" y="79727"/>
+                  </a:lnTo>
+                  <a:lnTo>
+                    <a:pt x="2136918" y="85097"/>
+                  </a:lnTo>
+                  <a:lnTo>
+                    <a:pt x="2060450" y="90426"/>
+                  </a:lnTo>
+                  <a:lnTo>
+                    <a:pt x="1983981" y="95714"/>
+                  </a:lnTo>
+                  <a:lnTo>
+                    <a:pt x="1907513" y="100961"/>
+                  </a:lnTo>
+                  <a:lnTo>
+                    <a:pt x="1831044" y="106167"/>
+                  </a:lnTo>
+                  <a:lnTo>
+                    <a:pt x="1754576" y="111334"/>
+                  </a:lnTo>
+                  <a:lnTo>
+                    <a:pt x="1678107" y="116460"/>
+                  </a:lnTo>
+                  <a:lnTo>
+                    <a:pt x="1601639" y="121547"/>
+                  </a:lnTo>
+                  <a:lnTo>
+                    <a:pt x="1525171" y="126594"/>
+                  </a:lnTo>
+                  <a:lnTo>
+                    <a:pt x="1448702" y="131602"/>
+                  </a:lnTo>
+                  <a:lnTo>
+                    <a:pt x="1372234" y="136572"/>
+                  </a:lnTo>
+                  <a:lnTo>
+                    <a:pt x="1295765" y="141504"/>
+                  </a:lnTo>
+                  <a:lnTo>
+                    <a:pt x="1219297" y="146397"/>
+                  </a:lnTo>
+                  <a:lnTo>
+                    <a:pt x="1142828" y="151252"/>
+                  </a:lnTo>
+                  <a:lnTo>
+                    <a:pt x="1066360" y="156070"/>
+                  </a:lnTo>
+                  <a:lnTo>
+                    <a:pt x="989892" y="160851"/>
+                  </a:lnTo>
+                  <a:lnTo>
+                    <a:pt x="913423" y="165595"/>
+                  </a:lnTo>
+                  <a:lnTo>
+                    <a:pt x="836955" y="170302"/>
+                  </a:lnTo>
+                  <a:lnTo>
+                    <a:pt x="760486" y="174973"/>
+                  </a:lnTo>
+                  <a:lnTo>
+                    <a:pt x="684018" y="179608"/>
+                  </a:lnTo>
+                  <a:lnTo>
+                    <a:pt x="607549" y="184207"/>
+                  </a:lnTo>
+                  <a:lnTo>
+                    <a:pt x="531081" y="188770"/>
+                  </a:lnTo>
+                  <a:lnTo>
+                    <a:pt x="454613" y="193298"/>
+                  </a:lnTo>
+                  <a:lnTo>
+                    <a:pt x="378144" y="197791"/>
+                  </a:lnTo>
+                  <a:lnTo>
+                    <a:pt x="301676" y="202250"/>
+                  </a:lnTo>
+                  <a:lnTo>
+                    <a:pt x="225207" y="206674"/>
+                  </a:lnTo>
+                  <a:lnTo>
+                    <a:pt x="148739" y="211064"/>
+                  </a:lnTo>
+                  <a:lnTo>
+                    <a:pt x="72270" y="215420"/>
+                  </a:lnTo>
+                  <a:lnTo>
+                    <a:pt x="0" y="219505"/>
                   </a:lnTo>
                 </a:path>
               </a:pathLst>
@@ -4097,306 +4484,306 @@
         </p:sp>
         <p:sp>
           <p:nvSpPr>
-            <p:cNvPr id="24" name="pl24"/>
+            <p:cNvPr id="33" name="pl33"/>
             <p:cNvSpPr/>
             <p:nvPr/>
           </p:nvSpPr>
           <p:spPr>
             <a:xfrm>
-              <a:off x="915645" y="2518031"/>
-              <a:ext cx="7260303" cy="2743464"/>
+              <a:off x="915645" y="2500174"/>
+              <a:ext cx="7260303" cy="2795212"/>
             </a:xfrm>
             <a:custGeom>
               <a:avLst/>
               <a:pathLst>
-                <a:path w="7260303" h="2743464">
+                <a:path w="7260303" h="2795212">
                   <a:moveTo>
                     <a:pt x="0" y="0"/>
                   </a:moveTo>
                   <a:lnTo>
-                    <a:pt x="72270" y="82763"/>
-                  </a:lnTo>
-                  <a:lnTo>
-                    <a:pt x="148739" y="167697"/>
-                  </a:lnTo>
-                  <a:lnTo>
-                    <a:pt x="225207" y="250072"/>
-                  </a:lnTo>
-                  <a:lnTo>
-                    <a:pt x="301676" y="329966"/>
-                  </a:lnTo>
-                  <a:lnTo>
-                    <a:pt x="378144" y="407453"/>
-                  </a:lnTo>
-                  <a:lnTo>
-                    <a:pt x="454613" y="482607"/>
-                  </a:lnTo>
-                  <a:lnTo>
-                    <a:pt x="531081" y="555497"/>
-                  </a:lnTo>
-                  <a:lnTo>
-                    <a:pt x="607549" y="626191"/>
-                  </a:lnTo>
-                  <a:lnTo>
-                    <a:pt x="684018" y="694756"/>
-                  </a:lnTo>
-                  <a:lnTo>
-                    <a:pt x="760486" y="761256"/>
-                  </a:lnTo>
-                  <a:lnTo>
-                    <a:pt x="836955" y="825753"/>
-                  </a:lnTo>
-                  <a:lnTo>
-                    <a:pt x="913423" y="888308"/>
-                  </a:lnTo>
-                  <a:lnTo>
-                    <a:pt x="989892" y="948978"/>
-                  </a:lnTo>
-                  <a:lnTo>
-                    <a:pt x="1066360" y="1007820"/>
-                  </a:lnTo>
-                  <a:lnTo>
-                    <a:pt x="1142828" y="1064891"/>
-                  </a:lnTo>
-                  <a:lnTo>
-                    <a:pt x="1219297" y="1120242"/>
-                  </a:lnTo>
-                  <a:lnTo>
-                    <a:pt x="1295765" y="1173926"/>
-                  </a:lnTo>
-                  <a:lnTo>
-                    <a:pt x="1372234" y="1225994"/>
-                  </a:lnTo>
-                  <a:lnTo>
-                    <a:pt x="1448702" y="1276493"/>
-                  </a:lnTo>
-                  <a:lnTo>
-                    <a:pt x="1525171" y="1325471"/>
-                  </a:lnTo>
-                  <a:lnTo>
-                    <a:pt x="1601639" y="1372973"/>
-                  </a:lnTo>
-                  <a:lnTo>
-                    <a:pt x="1678107" y="1419045"/>
-                  </a:lnTo>
-                  <a:lnTo>
-                    <a:pt x="1754576" y="1463730"/>
-                  </a:lnTo>
-                  <a:lnTo>
-                    <a:pt x="1831044" y="1507068"/>
-                  </a:lnTo>
-                  <a:lnTo>
-                    <a:pt x="1907513" y="1549101"/>
-                  </a:lnTo>
-                  <a:lnTo>
-                    <a:pt x="1983981" y="1589868"/>
-                  </a:lnTo>
-                  <a:lnTo>
-                    <a:pt x="2060450" y="1629407"/>
-                  </a:lnTo>
-                  <a:lnTo>
-                    <a:pt x="2136918" y="1667755"/>
-                  </a:lnTo>
-                  <a:lnTo>
-                    <a:pt x="2213386" y="1704948"/>
-                  </a:lnTo>
-                  <a:lnTo>
-                    <a:pt x="2289855" y="1741021"/>
-                  </a:lnTo>
-                  <a:lnTo>
-                    <a:pt x="2366323" y="1776007"/>
-                  </a:lnTo>
-                  <a:lnTo>
-                    <a:pt x="2442792" y="1809940"/>
-                  </a:lnTo>
-                  <a:lnTo>
-                    <a:pt x="2519260" y="1842850"/>
-                  </a:lnTo>
-                  <a:lnTo>
-                    <a:pt x="2595729" y="1874769"/>
-                  </a:lnTo>
-                  <a:lnTo>
-                    <a:pt x="2672197" y="1905727"/>
-                  </a:lnTo>
-                  <a:lnTo>
-                    <a:pt x="2748666" y="1935752"/>
-                  </a:lnTo>
-                  <a:lnTo>
-                    <a:pt x="2825134" y="1964873"/>
-                  </a:lnTo>
-                  <a:lnTo>
-                    <a:pt x="2901602" y="1993117"/>
-                  </a:lnTo>
-                  <a:lnTo>
-                    <a:pt x="2978071" y="2020510"/>
-                  </a:lnTo>
-                  <a:lnTo>
-                    <a:pt x="3054539" y="2047078"/>
-                  </a:lnTo>
-                  <a:lnTo>
-                    <a:pt x="3131008" y="2072846"/>
-                  </a:lnTo>
-                  <a:lnTo>
-                    <a:pt x="3207476" y="2097837"/>
-                  </a:lnTo>
-                  <a:lnTo>
-                    <a:pt x="3283945" y="2122076"/>
-                  </a:lnTo>
-                  <a:lnTo>
-                    <a:pt x="3360413" y="2145585"/>
-                  </a:lnTo>
-                  <a:lnTo>
-                    <a:pt x="3436881" y="2168386"/>
-                  </a:lnTo>
-                  <a:lnTo>
-                    <a:pt x="3513350" y="2190500"/>
-                  </a:lnTo>
-                  <a:lnTo>
-                    <a:pt x="3589818" y="2211948"/>
-                  </a:lnTo>
-                  <a:lnTo>
-                    <a:pt x="3666287" y="2232750"/>
-                  </a:lnTo>
-                  <a:lnTo>
-                    <a:pt x="3742755" y="2252925"/>
-                  </a:lnTo>
-                  <a:lnTo>
-                    <a:pt x="3819224" y="2272492"/>
-                  </a:lnTo>
-                  <a:lnTo>
-                    <a:pt x="3895692" y="2291471"/>
-                  </a:lnTo>
-                  <a:lnTo>
-                    <a:pt x="3972160" y="2309877"/>
-                  </a:lnTo>
-                  <a:lnTo>
-                    <a:pt x="4048629" y="2327730"/>
-                  </a:lnTo>
-                  <a:lnTo>
-                    <a:pt x="4125097" y="2345044"/>
-                  </a:lnTo>
-                  <a:lnTo>
-                    <a:pt x="4201566" y="2361837"/>
-                  </a:lnTo>
-                  <a:lnTo>
-                    <a:pt x="4278034" y="2378124"/>
-                  </a:lnTo>
-                  <a:lnTo>
-                    <a:pt x="4354503" y="2393921"/>
-                  </a:lnTo>
-                  <a:lnTo>
-                    <a:pt x="4430971" y="2409242"/>
-                  </a:lnTo>
-                  <a:lnTo>
-                    <a:pt x="4507439" y="2424101"/>
-                  </a:lnTo>
-                  <a:lnTo>
-                    <a:pt x="4583908" y="2438513"/>
-                  </a:lnTo>
-                  <a:lnTo>
-                    <a:pt x="4660376" y="2452490"/>
-                  </a:lnTo>
-                  <a:lnTo>
-                    <a:pt x="4736845" y="2466047"/>
-                  </a:lnTo>
-                  <a:lnTo>
-                    <a:pt x="4813313" y="2479195"/>
-                  </a:lnTo>
-                  <a:lnTo>
-                    <a:pt x="4889782" y="2491948"/>
-                  </a:lnTo>
-                  <a:lnTo>
-                    <a:pt x="4966250" y="2504316"/>
-                  </a:lnTo>
-                  <a:lnTo>
-                    <a:pt x="5042719" y="2516312"/>
-                  </a:lnTo>
-                  <a:lnTo>
-                    <a:pt x="5119187" y="2527946"/>
-                  </a:lnTo>
-                  <a:lnTo>
-                    <a:pt x="5195655" y="2539230"/>
-                  </a:lnTo>
-                  <a:lnTo>
-                    <a:pt x="5272124" y="2550174"/>
-                  </a:lnTo>
-                  <a:lnTo>
-                    <a:pt x="5348592" y="2560788"/>
-                  </a:lnTo>
-                  <a:lnTo>
-                    <a:pt x="5425061" y="2571083"/>
-                  </a:lnTo>
-                  <a:lnTo>
-                    <a:pt x="5501529" y="2581068"/>
-                  </a:lnTo>
-                  <a:lnTo>
-                    <a:pt x="5577998" y="2590752"/>
-                  </a:lnTo>
-                  <a:lnTo>
-                    <a:pt x="5654466" y="2600144"/>
-                  </a:lnTo>
-                  <a:lnTo>
-                    <a:pt x="5730934" y="2609253"/>
-                  </a:lnTo>
-                  <a:lnTo>
-                    <a:pt x="5807403" y="2618088"/>
-                  </a:lnTo>
-                  <a:lnTo>
-                    <a:pt x="5883871" y="2626657"/>
-                  </a:lnTo>
-                  <a:lnTo>
-                    <a:pt x="5960340" y="2634968"/>
-                  </a:lnTo>
-                  <a:lnTo>
-                    <a:pt x="6036808" y="2643028"/>
-                  </a:lnTo>
-                  <a:lnTo>
-                    <a:pt x="6113277" y="2650846"/>
-                  </a:lnTo>
-                  <a:lnTo>
-                    <a:pt x="6189745" y="2658428"/>
-                  </a:lnTo>
-                  <a:lnTo>
-                    <a:pt x="6266213" y="2665782"/>
-                  </a:lnTo>
-                  <a:lnTo>
-                    <a:pt x="6342682" y="2672914"/>
-                  </a:lnTo>
-                  <a:lnTo>
-                    <a:pt x="6419150" y="2679832"/>
-                  </a:lnTo>
-                  <a:lnTo>
-                    <a:pt x="6495619" y="2686541"/>
-                  </a:lnTo>
-                  <a:lnTo>
-                    <a:pt x="6572087" y="2693048"/>
-                  </a:lnTo>
-                  <a:lnTo>
-                    <a:pt x="6648556" y="2699359"/>
-                  </a:lnTo>
-                  <a:lnTo>
-                    <a:pt x="6725024" y="2705480"/>
-                  </a:lnTo>
-                  <a:lnTo>
-                    <a:pt x="6801492" y="2711416"/>
-                  </a:lnTo>
-                  <a:lnTo>
-                    <a:pt x="6877961" y="2717174"/>
-                  </a:lnTo>
-                  <a:lnTo>
-                    <a:pt x="6954429" y="2722759"/>
-                  </a:lnTo>
-                  <a:lnTo>
-                    <a:pt x="7030898" y="2728175"/>
-                  </a:lnTo>
-                  <a:lnTo>
-                    <a:pt x="7107366" y="2733428"/>
-                  </a:lnTo>
-                  <a:lnTo>
-                    <a:pt x="7183835" y="2738523"/>
-                  </a:lnTo>
-                  <a:lnTo>
-                    <a:pt x="7260303" y="2743464"/>
+                    <a:pt x="72270" y="84325"/>
+                  </a:lnTo>
+                  <a:lnTo>
+                    <a:pt x="148739" y="170860"/>
+                  </a:lnTo>
+                  <a:lnTo>
+                    <a:pt x="225207" y="254789"/>
+                  </a:lnTo>
+                  <a:lnTo>
+                    <a:pt x="301676" y="336190"/>
+                  </a:lnTo>
+                  <a:lnTo>
+                    <a:pt x="378144" y="415139"/>
+                  </a:lnTo>
+                  <a:lnTo>
+                    <a:pt x="454613" y="491710"/>
+                  </a:lnTo>
+                  <a:lnTo>
+                    <a:pt x="531081" y="565975"/>
+                  </a:lnTo>
+                  <a:lnTo>
+                    <a:pt x="607549" y="638003"/>
+                  </a:lnTo>
+                  <a:lnTo>
+                    <a:pt x="684018" y="707861"/>
+                  </a:lnTo>
+                  <a:lnTo>
+                    <a:pt x="760486" y="775615"/>
+                  </a:lnTo>
+                  <a:lnTo>
+                    <a:pt x="836955" y="841329"/>
+                  </a:lnTo>
+                  <a:lnTo>
+                    <a:pt x="913423" y="905063"/>
+                  </a:lnTo>
+                  <a:lnTo>
+                    <a:pt x="989892" y="966878"/>
+                  </a:lnTo>
+                  <a:lnTo>
+                    <a:pt x="1066360" y="1026830"/>
+                  </a:lnTo>
+                  <a:lnTo>
+                    <a:pt x="1142828" y="1084977"/>
+                  </a:lnTo>
+                  <a:lnTo>
+                    <a:pt x="1219297" y="1141373"/>
+                  </a:lnTo>
+                  <a:lnTo>
+                    <a:pt x="1295765" y="1196069"/>
+                  </a:lnTo>
+                  <a:lnTo>
+                    <a:pt x="1372234" y="1249119"/>
+                  </a:lnTo>
+                  <a:lnTo>
+                    <a:pt x="1448702" y="1300570"/>
+                  </a:lnTo>
+                  <a:lnTo>
+                    <a:pt x="1525171" y="1350472"/>
+                  </a:lnTo>
+                  <a:lnTo>
+                    <a:pt x="1601639" y="1398871"/>
+                  </a:lnTo>
+                  <a:lnTo>
+                    <a:pt x="1678107" y="1445812"/>
+                  </a:lnTo>
+                  <a:lnTo>
+                    <a:pt x="1754576" y="1491339"/>
+                  </a:lnTo>
+                  <a:lnTo>
+                    <a:pt x="1831044" y="1535495"/>
+                  </a:lnTo>
+                  <a:lnTo>
+                    <a:pt x="1907513" y="1578320"/>
+                  </a:lnTo>
+                  <a:lnTo>
+                    <a:pt x="1983981" y="1619856"/>
+                  </a:lnTo>
+                  <a:lnTo>
+                    <a:pt x="2060450" y="1660141"/>
+                  </a:lnTo>
+                  <a:lnTo>
+                    <a:pt x="2136918" y="1699212"/>
+                  </a:lnTo>
+                  <a:lnTo>
+                    <a:pt x="2213386" y="1737107"/>
+                  </a:lnTo>
+                  <a:lnTo>
+                    <a:pt x="2289855" y="1773860"/>
+                  </a:lnTo>
+                  <a:lnTo>
+                    <a:pt x="2366323" y="1809506"/>
+                  </a:lnTo>
+                  <a:lnTo>
+                    <a:pt x="2442792" y="1844079"/>
+                  </a:lnTo>
+                  <a:lnTo>
+                    <a:pt x="2519260" y="1877610"/>
+                  </a:lnTo>
+                  <a:lnTo>
+                    <a:pt x="2595729" y="1910131"/>
+                  </a:lnTo>
+                  <a:lnTo>
+                    <a:pt x="2672197" y="1941673"/>
+                  </a:lnTo>
+                  <a:lnTo>
+                    <a:pt x="2748666" y="1972265"/>
+                  </a:lnTo>
+                  <a:lnTo>
+                    <a:pt x="2825134" y="2001935"/>
+                  </a:lnTo>
+                  <a:lnTo>
+                    <a:pt x="2901602" y="2030711"/>
+                  </a:lnTo>
+                  <a:lnTo>
+                    <a:pt x="2978071" y="2058621"/>
+                  </a:lnTo>
+                  <a:lnTo>
+                    <a:pt x="3054539" y="2085690"/>
+                  </a:lnTo>
+                  <a:lnTo>
+                    <a:pt x="3131008" y="2111944"/>
+                  </a:lnTo>
+                  <a:lnTo>
+                    <a:pt x="3207476" y="2137407"/>
+                  </a:lnTo>
+                  <a:lnTo>
+                    <a:pt x="3283945" y="2162103"/>
+                  </a:lnTo>
+                  <a:lnTo>
+                    <a:pt x="3360413" y="2186056"/>
+                  </a:lnTo>
+                  <a:lnTo>
+                    <a:pt x="3436881" y="2209286"/>
+                  </a:lnTo>
+                  <a:lnTo>
+                    <a:pt x="3513350" y="2231817"/>
+                  </a:lnTo>
+                  <a:lnTo>
+                    <a:pt x="3589818" y="2253670"/>
+                  </a:lnTo>
+                  <a:lnTo>
+                    <a:pt x="3666287" y="2274864"/>
+                  </a:lnTo>
+                  <a:lnTo>
+                    <a:pt x="3742755" y="2295420"/>
+                  </a:lnTo>
+                  <a:lnTo>
+                    <a:pt x="3819224" y="2315357"/>
+                  </a:lnTo>
+                  <a:lnTo>
+                    <a:pt x="3895692" y="2334693"/>
+                  </a:lnTo>
+                  <a:lnTo>
+                    <a:pt x="3972160" y="2353447"/>
+                  </a:lnTo>
+                  <a:lnTo>
+                    <a:pt x="4048629" y="2371636"/>
+                  </a:lnTo>
+                  <a:lnTo>
+                    <a:pt x="4125097" y="2389277"/>
+                  </a:lnTo>
+                  <a:lnTo>
+                    <a:pt x="4201566" y="2406387"/>
+                  </a:lnTo>
+                  <a:lnTo>
+                    <a:pt x="4278034" y="2422981"/>
+                  </a:lnTo>
+                  <a:lnTo>
+                    <a:pt x="4354503" y="2439075"/>
+                  </a:lnTo>
+                  <a:lnTo>
+                    <a:pt x="4430971" y="2454685"/>
+                  </a:lnTo>
+                  <a:lnTo>
+                    <a:pt x="4507439" y="2469825"/>
+                  </a:lnTo>
+                  <a:lnTo>
+                    <a:pt x="4583908" y="2484508"/>
+                  </a:lnTo>
+                  <a:lnTo>
+                    <a:pt x="4660376" y="2498750"/>
+                  </a:lnTo>
+                  <a:lnTo>
+                    <a:pt x="4736845" y="2512562"/>
+                  </a:lnTo>
+                  <a:lnTo>
+                    <a:pt x="4813313" y="2525959"/>
+                  </a:lnTo>
+                  <a:lnTo>
+                    <a:pt x="4889782" y="2538951"/>
+                  </a:lnTo>
+                  <a:lnTo>
+                    <a:pt x="4966250" y="2551553"/>
+                  </a:lnTo>
+                  <a:lnTo>
+                    <a:pt x="5042719" y="2563775"/>
+                  </a:lnTo>
+                  <a:lnTo>
+                    <a:pt x="5119187" y="2575629"/>
+                  </a:lnTo>
+                  <a:lnTo>
+                    <a:pt x="5195655" y="2587125"/>
+                  </a:lnTo>
+                  <a:lnTo>
+                    <a:pt x="5272124" y="2598276"/>
+                  </a:lnTo>
+                  <a:lnTo>
+                    <a:pt x="5348592" y="2609091"/>
+                  </a:lnTo>
+                  <a:lnTo>
+                    <a:pt x="5425061" y="2619580"/>
+                  </a:lnTo>
+                  <a:lnTo>
+                    <a:pt x="5501529" y="2629752"/>
+                  </a:lnTo>
+                  <a:lnTo>
+                    <a:pt x="5577998" y="2639619"/>
+                  </a:lnTo>
+                  <a:lnTo>
+                    <a:pt x="5654466" y="2649188"/>
+                  </a:lnTo>
+                  <a:lnTo>
+                    <a:pt x="5730934" y="2658470"/>
+                  </a:lnTo>
+                  <a:lnTo>
+                    <a:pt x="5807403" y="2667471"/>
+                  </a:lnTo>
+                  <a:lnTo>
+                    <a:pt x="5883871" y="2676202"/>
+                  </a:lnTo>
+                  <a:lnTo>
+                    <a:pt x="5960340" y="2684669"/>
+                  </a:lnTo>
+                  <a:lnTo>
+                    <a:pt x="6036808" y="2692882"/>
+                  </a:lnTo>
+                  <a:lnTo>
+                    <a:pt x="6113277" y="2700847"/>
+                  </a:lnTo>
+                  <a:lnTo>
+                    <a:pt x="6189745" y="2708572"/>
+                  </a:lnTo>
+                  <a:lnTo>
+                    <a:pt x="6266213" y="2716064"/>
+                  </a:lnTo>
+                  <a:lnTo>
+                    <a:pt x="6342682" y="2723331"/>
+                  </a:lnTo>
+                  <a:lnTo>
+                    <a:pt x="6419150" y="2730379"/>
+                  </a:lnTo>
+                  <a:lnTo>
+                    <a:pt x="6495619" y="2737215"/>
+                  </a:lnTo>
+                  <a:lnTo>
+                    <a:pt x="6572087" y="2743845"/>
+                  </a:lnTo>
+                  <a:lnTo>
+                    <a:pt x="6648556" y="2750275"/>
+                  </a:lnTo>
+                  <a:lnTo>
+                    <a:pt x="6725024" y="2756511"/>
+                  </a:lnTo>
+                  <a:lnTo>
+                    <a:pt x="6801492" y="2762560"/>
+                  </a:lnTo>
+                  <a:lnTo>
+                    <a:pt x="6877961" y="2768426"/>
+                  </a:lnTo>
+                  <a:lnTo>
+                    <a:pt x="6954429" y="2774116"/>
+                  </a:lnTo>
+                  <a:lnTo>
+                    <a:pt x="7030898" y="2779634"/>
+                  </a:lnTo>
+                  <a:lnTo>
+                    <a:pt x="7107366" y="2784986"/>
+                  </a:lnTo>
+                  <a:lnTo>
+                    <a:pt x="7183835" y="2790177"/>
+                  </a:lnTo>
+                  <a:lnTo>
+                    <a:pt x="7260303" y="2795212"/>
                   </a:lnTo>
                 </a:path>
               </a:pathLst>
@@ -4419,13 +4806,13 @@
         </p:sp>
         <p:sp>
           <p:nvSpPr>
-            <p:cNvPr id="25" name="pl25"/>
+            <p:cNvPr id="34" name="pl34"/>
             <p:cNvSpPr/>
             <p:nvPr/>
           </p:nvSpPr>
           <p:spPr>
             <a:xfrm>
-              <a:off x="915645" y="4655980"/>
+              <a:off x="915645" y="4678449"/>
               <a:ext cx="7682587" cy="0"/>
             </a:xfrm>
             <a:custGeom>
@@ -4462,21 +4849,21 @@
         </p:sp>
         <p:sp>
           <p:nvSpPr>
-            <p:cNvPr id="26" name="pl26"/>
+            <p:cNvPr id="35" name="pl35"/>
             <p:cNvSpPr/>
             <p:nvPr/>
           </p:nvSpPr>
           <p:spPr>
             <a:xfrm>
-              <a:off x="4250960" y="2209169"/>
-              <a:ext cx="0" cy="3364365"/>
+              <a:off x="4250960" y="2185486"/>
+              <a:ext cx="0" cy="3427824"/>
             </a:xfrm>
             <a:custGeom>
               <a:avLst/>
               <a:pathLst>
-                <a:path w="0" h="3364365">
+                <a:path w="0" h="3427824">
                   <a:moveTo>
-                    <a:pt x="0" y="3364365"/>
+                    <a:pt x="0" y="3427824"/>
                   </a:moveTo>
                   <a:lnTo>
                     <a:pt x="0" y="0"/>
@@ -4505,13 +4892,13 @@
         </p:sp>
         <p:sp>
           <p:nvSpPr>
-            <p:cNvPr id="27" name="tx27"/>
+            <p:cNvPr id="36" name="tx36"/>
             <p:cNvSpPr/>
             <p:nvPr/>
           </p:nvSpPr>
           <p:spPr>
             <a:xfrm>
-              <a:off x="756929" y="5369631"/>
+              <a:off x="756929" y="5406523"/>
               <a:ext cx="79004" cy="101955"/>
             </a:xfrm>
             <a:prstGeom prst="rect">
@@ -4551,13 +4938,13 @@
         </p:sp>
         <p:sp>
           <p:nvSpPr>
-            <p:cNvPr id="28" name="tx28"/>
+            <p:cNvPr id="37" name="tx37"/>
             <p:cNvSpPr/>
             <p:nvPr/>
           </p:nvSpPr>
           <p:spPr>
             <a:xfrm>
-              <a:off x="756929" y="4605002"/>
+              <a:off x="756929" y="4627472"/>
               <a:ext cx="79004" cy="101955"/>
             </a:xfrm>
             <a:prstGeom prst="rect">
@@ -4597,13 +4984,13 @@
         </p:sp>
         <p:sp>
           <p:nvSpPr>
-            <p:cNvPr id="29" name="tx29"/>
+            <p:cNvPr id="38" name="tx38"/>
             <p:cNvSpPr/>
             <p:nvPr/>
           </p:nvSpPr>
           <p:spPr>
             <a:xfrm>
-              <a:off x="756929" y="3840374"/>
+              <a:off x="756929" y="3848420"/>
               <a:ext cx="79004" cy="101955"/>
             </a:xfrm>
             <a:prstGeom prst="rect">
@@ -4643,13 +5030,13 @@
         </p:sp>
         <p:sp>
           <p:nvSpPr>
-            <p:cNvPr id="30" name="tx30"/>
+            <p:cNvPr id="39" name="tx39"/>
             <p:cNvSpPr/>
             <p:nvPr/>
           </p:nvSpPr>
           <p:spPr>
             <a:xfrm>
-              <a:off x="756929" y="3075745"/>
+              <a:off x="756929" y="3069369"/>
               <a:ext cx="79004" cy="101955"/>
             </a:xfrm>
             <a:prstGeom prst="rect">
@@ -4689,13 +5076,13 @@
         </p:sp>
         <p:sp>
           <p:nvSpPr>
-            <p:cNvPr id="31" name="tx31"/>
+            <p:cNvPr id="40" name="tx40"/>
             <p:cNvSpPr/>
             <p:nvPr/>
           </p:nvSpPr>
           <p:spPr>
             <a:xfrm>
-              <a:off x="756929" y="2311117"/>
+              <a:off x="756929" y="2290318"/>
               <a:ext cx="79004" cy="101955"/>
             </a:xfrm>
             <a:prstGeom prst="rect">
@@ -4735,14 +5122,14 @@
         </p:sp>
         <p:sp>
           <p:nvSpPr>
-            <p:cNvPr id="32" name="tx32"/>
+            <p:cNvPr id="41" name="tx41"/>
             <p:cNvSpPr/>
             <p:nvPr/>
           </p:nvSpPr>
           <p:spPr>
             <a:xfrm>
-              <a:off x="2451993" y="5653245"/>
-              <a:ext cx="244784" cy="101955"/>
+              <a:off x="1598722" y="5693022"/>
+              <a:ext cx="205282" cy="101955"/>
             </a:xfrm>
             <a:prstGeom prst="rect">
               <a:avLst/>
@@ -4774,21 +5161,21 @@
                   <a:latin typeface="Helvetica"/>
                   <a:cs typeface="Helvetica"/>
                 </a:rPr>
-                <a:t>-0.2</a:t>
+                <a:t>-30</a:t>
               </a:r>
             </a:p>
           </p:txBody>
         </p:sp>
         <p:sp>
           <p:nvSpPr>
-            <p:cNvPr id="33" name="tx33"/>
+            <p:cNvPr id="42" name="tx42"/>
             <p:cNvSpPr/>
             <p:nvPr/>
           </p:nvSpPr>
           <p:spPr>
             <a:xfrm>
-              <a:off x="4221672" y="5653245"/>
-              <a:ext cx="197510" cy="101955"/>
+              <a:off x="2471744" y="5693022"/>
+              <a:ext cx="205282" cy="101955"/>
             </a:xfrm>
             <a:prstGeom prst="rect">
               <a:avLst/>
@@ -4820,21 +5207,21 @@
                   <a:latin typeface="Helvetica"/>
                   <a:cs typeface="Helvetica"/>
                 </a:rPr>
-                <a:t>0.0</a:t>
+                <a:t>-20</a:t>
               </a:r>
             </a:p>
           </p:txBody>
         </p:sp>
         <p:sp>
           <p:nvSpPr>
-            <p:cNvPr id="34" name="tx34"/>
+            <p:cNvPr id="43" name="tx43"/>
             <p:cNvSpPr/>
             <p:nvPr/>
           </p:nvSpPr>
           <p:spPr>
             <a:xfrm>
-              <a:off x="5967715" y="5653245"/>
-              <a:ext cx="197510" cy="101955"/>
+              <a:off x="3344765" y="5693022"/>
+              <a:ext cx="205282" cy="101955"/>
             </a:xfrm>
             <a:prstGeom prst="rect">
               <a:avLst/>
@@ -4866,21 +5253,21 @@
                   <a:latin typeface="Helvetica"/>
                   <a:cs typeface="Helvetica"/>
                 </a:rPr>
-                <a:t>0.2</a:t>
+                <a:t>-10</a:t>
               </a:r>
             </a:p>
           </p:txBody>
         </p:sp>
         <p:sp>
           <p:nvSpPr>
-            <p:cNvPr id="35" name="tx35"/>
+            <p:cNvPr id="44" name="tx44"/>
             <p:cNvSpPr/>
             <p:nvPr/>
           </p:nvSpPr>
           <p:spPr>
             <a:xfrm>
-              <a:off x="7713757" y="5653245"/>
-              <a:ext cx="197510" cy="101955"/>
+              <a:off x="4280925" y="5693022"/>
+              <a:ext cx="79004" cy="101955"/>
             </a:xfrm>
             <a:prstGeom prst="rect">
               <a:avLst/>
@@ -4912,21 +5299,205 @@
                   <a:latin typeface="Helvetica"/>
                   <a:cs typeface="Helvetica"/>
                 </a:rPr>
-                <a:t>0.4</a:t>
+                <a:t>0</a:t>
               </a:r>
             </a:p>
           </p:txBody>
         </p:sp>
         <p:sp>
           <p:nvSpPr>
-            <p:cNvPr id="36" name="tx36"/>
+            <p:cNvPr id="45" name="tx45"/>
             <p:cNvSpPr/>
             <p:nvPr/>
           </p:nvSpPr>
           <p:spPr>
             <a:xfrm>
-              <a:off x="2688337" y="5834415"/>
-              <a:ext cx="2138873" cy="127558"/>
+              <a:off x="5114445" y="5693022"/>
+              <a:ext cx="158008" cy="101955"/>
+            </a:xfrm>
+            <a:prstGeom prst="rect">
+              <a:avLst/>
+            </a:prstGeom>
+            <a:noFill/>
+          </p:spPr>
+          <p:txBody>
+            <a:bodyPr lIns="0" rIns="0" tIns="0" bIns="0" anchorCtr="1" anchor="ctr" wrap="none"/>
+            <a:lstStyle/>
+            <a:p>
+              <a:pPr algn="l" marL="0" marR="0" indent="0">
+                <a:lnSpc>
+                  <a:spcPts val="1120"/>
+                </a:lnSpc>
+                <a:spcBef>
+                  <a:spcPts val="0"/>
+                </a:spcBef>
+                <a:spcAft>
+                  <a:spcPts val="0"/>
+                </a:spcAft>
+              </a:pPr>
+              <a:r>
+                <a:rPr sz="1120">
+                  <a:solidFill>
+                    <a:srgbClr val="4D4D4D">
+                      <a:alpha val="100000"/>
+                    </a:srgbClr>
+                  </a:solidFill>
+                  <a:latin typeface="Helvetica"/>
+                  <a:cs typeface="Helvetica"/>
+                </a:rPr>
+                <a:t>10</a:t>
+              </a:r>
+            </a:p>
+          </p:txBody>
+        </p:sp>
+        <p:sp>
+          <p:nvSpPr>
+            <p:cNvPr id="46" name="tx46"/>
+            <p:cNvSpPr/>
+            <p:nvPr/>
+          </p:nvSpPr>
+          <p:spPr>
+            <a:xfrm>
+              <a:off x="5987466" y="5693022"/>
+              <a:ext cx="158008" cy="101955"/>
+            </a:xfrm>
+            <a:prstGeom prst="rect">
+              <a:avLst/>
+            </a:prstGeom>
+            <a:noFill/>
+          </p:spPr>
+          <p:txBody>
+            <a:bodyPr lIns="0" rIns="0" tIns="0" bIns="0" anchorCtr="1" anchor="ctr" wrap="none"/>
+            <a:lstStyle/>
+            <a:p>
+              <a:pPr algn="l" marL="0" marR="0" indent="0">
+                <a:lnSpc>
+                  <a:spcPts val="1120"/>
+                </a:lnSpc>
+                <a:spcBef>
+                  <a:spcPts val="0"/>
+                </a:spcBef>
+                <a:spcAft>
+                  <a:spcPts val="0"/>
+                </a:spcAft>
+              </a:pPr>
+              <a:r>
+                <a:rPr sz="1120">
+                  <a:solidFill>
+                    <a:srgbClr val="4D4D4D">
+                      <a:alpha val="100000"/>
+                    </a:srgbClr>
+                  </a:solidFill>
+                  <a:latin typeface="Helvetica"/>
+                  <a:cs typeface="Helvetica"/>
+                </a:rPr>
+                <a:t>20</a:t>
+              </a:r>
+            </a:p>
+          </p:txBody>
+        </p:sp>
+        <p:sp>
+          <p:nvSpPr>
+            <p:cNvPr id="47" name="tx47"/>
+            <p:cNvSpPr/>
+            <p:nvPr/>
+          </p:nvSpPr>
+          <p:spPr>
+            <a:xfrm>
+              <a:off x="6860487" y="5693022"/>
+              <a:ext cx="158008" cy="101955"/>
+            </a:xfrm>
+            <a:prstGeom prst="rect">
+              <a:avLst/>
+            </a:prstGeom>
+            <a:noFill/>
+          </p:spPr>
+          <p:txBody>
+            <a:bodyPr lIns="0" rIns="0" tIns="0" bIns="0" anchorCtr="1" anchor="ctr" wrap="none"/>
+            <a:lstStyle/>
+            <a:p>
+              <a:pPr algn="l" marL="0" marR="0" indent="0">
+                <a:lnSpc>
+                  <a:spcPts val="1120"/>
+                </a:lnSpc>
+                <a:spcBef>
+                  <a:spcPts val="0"/>
+                </a:spcBef>
+                <a:spcAft>
+                  <a:spcPts val="0"/>
+                </a:spcAft>
+              </a:pPr>
+              <a:r>
+                <a:rPr sz="1120">
+                  <a:solidFill>
+                    <a:srgbClr val="4D4D4D">
+                      <a:alpha val="100000"/>
+                    </a:srgbClr>
+                  </a:solidFill>
+                  <a:latin typeface="Helvetica"/>
+                  <a:cs typeface="Helvetica"/>
+                </a:rPr>
+                <a:t>30</a:t>
+              </a:r>
+            </a:p>
+          </p:txBody>
+        </p:sp>
+        <p:sp>
+          <p:nvSpPr>
+            <p:cNvPr id="48" name="tx48"/>
+            <p:cNvSpPr/>
+            <p:nvPr/>
+          </p:nvSpPr>
+          <p:spPr>
+            <a:xfrm>
+              <a:off x="7733508" y="5693022"/>
+              <a:ext cx="158008" cy="101955"/>
+            </a:xfrm>
+            <a:prstGeom prst="rect">
+              <a:avLst/>
+            </a:prstGeom>
+            <a:noFill/>
+          </p:spPr>
+          <p:txBody>
+            <a:bodyPr lIns="0" rIns="0" tIns="0" bIns="0" anchorCtr="1" anchor="ctr" wrap="none"/>
+            <a:lstStyle/>
+            <a:p>
+              <a:pPr algn="l" marL="0" marR="0" indent="0">
+                <a:lnSpc>
+                  <a:spcPts val="1120"/>
+                </a:lnSpc>
+                <a:spcBef>
+                  <a:spcPts val="0"/>
+                </a:spcBef>
+                <a:spcAft>
+                  <a:spcPts val="0"/>
+                </a:spcAft>
+              </a:pPr>
+              <a:r>
+                <a:rPr sz="1120">
+                  <a:solidFill>
+                    <a:srgbClr val="4D4D4D">
+                      <a:alpha val="100000"/>
+                    </a:srgbClr>
+                  </a:solidFill>
+                  <a:latin typeface="Helvetica"/>
+                  <a:cs typeface="Helvetica"/>
+                </a:rPr>
+                <a:t>40</a:t>
+              </a:r>
+            </a:p>
+          </p:txBody>
+        </p:sp>
+        <p:sp>
+          <p:nvSpPr>
+            <p:cNvPr id="49" name="tx49"/>
+            <p:cNvSpPr/>
+            <p:nvPr/>
+          </p:nvSpPr>
+          <p:spPr>
+            <a:xfrm>
+              <a:off x="3941888" y="5870717"/>
+              <a:ext cx="1630100" cy="127558"/>
             </a:xfrm>
             <a:prstGeom prst="rect">
               <a:avLst/>
@@ -4958,572 +5529,20 @@
                   <a:latin typeface="Helvetica"/>
                   <a:cs typeface="Helvetica"/>
                 </a:rPr>
-                <a:t>eGFR difference  =  (eGFR</a:t>
+                <a:t>eGFR difference (%)</a:t>
               </a:r>
             </a:p>
           </p:txBody>
         </p:sp>
         <p:sp>
           <p:nvSpPr>
-            <p:cNvPr id="37" name="tx37"/>
-            <p:cNvSpPr/>
-            <p:nvPr/>
-          </p:nvSpPr>
-          <p:spPr>
-            <a:xfrm>
-              <a:off x="4827210" y="5905308"/>
-              <a:ext cx="89885" cy="89245"/>
-            </a:xfrm>
-            <a:prstGeom prst="rect">
-              <a:avLst/>
-            </a:prstGeom>
-            <a:noFill/>
-          </p:spPr>
-          <p:txBody>
-            <a:bodyPr lIns="0" rIns="0" tIns="0" bIns="0" anchorCtr="1" anchor="ctr" wrap="none"/>
-            <a:lstStyle/>
-            <a:p>
-              <a:pPr algn="l" marL="0" marR="0" indent="0">
-                <a:lnSpc>
-                  <a:spcPts val="979"/>
-                </a:lnSpc>
-                <a:spcBef>
-                  <a:spcPts val="0"/>
-                </a:spcBef>
-                <a:spcAft>
-                  <a:spcPts val="0"/>
-                </a:spcAft>
-              </a:pPr>
-              <a:r>
-                <a:rPr sz="979">
-                  <a:solidFill>
-                    <a:srgbClr val="000000">
-                      <a:alpha val="100000"/>
-                    </a:srgbClr>
-                  </a:solidFill>
-                  <a:latin typeface="Helvetica"/>
-                  <a:cs typeface="Helvetica"/>
-                </a:rPr>
-                <a:t>C</a:t>
-              </a:r>
-            </a:p>
-          </p:txBody>
-        </p:sp>
-        <p:sp>
-          <p:nvSpPr>
-            <p:cNvPr id="38" name="tx38"/>
-            <p:cNvSpPr/>
-            <p:nvPr/>
-          </p:nvSpPr>
-          <p:spPr>
-            <a:xfrm>
-              <a:off x="4917095" y="5905308"/>
-              <a:ext cx="89885" cy="89245"/>
-            </a:xfrm>
-            <a:prstGeom prst="rect">
-              <a:avLst/>
-            </a:prstGeom>
-            <a:noFill/>
-          </p:spPr>
-          <p:txBody>
-            <a:bodyPr lIns="0" rIns="0" tIns="0" bIns="0" anchorCtr="1" anchor="ctr" wrap="none"/>
-            <a:lstStyle/>
-            <a:p>
-              <a:pPr algn="l" marL="0" marR="0" indent="0">
-                <a:lnSpc>
-                  <a:spcPts val="979"/>
-                </a:lnSpc>
-                <a:spcBef>
-                  <a:spcPts val="0"/>
-                </a:spcBef>
-                <a:spcAft>
-                  <a:spcPts val="0"/>
-                </a:spcAft>
-              </a:pPr>
-              <a:r>
-                <a:rPr sz="979">
-                  <a:solidFill>
-                    <a:srgbClr val="000000">
-                      <a:alpha val="100000"/>
-                    </a:srgbClr>
-                  </a:solidFill>
-                  <a:latin typeface="Helvetica"/>
-                  <a:cs typeface="Helvetica"/>
-                </a:rPr>
-                <a:t>R</a:t>
-              </a:r>
-            </a:p>
-          </p:txBody>
-        </p:sp>
-        <p:sp>
-          <p:nvSpPr>
-            <p:cNvPr id="39" name="tx39"/>
-            <p:cNvSpPr/>
-            <p:nvPr/>
-          </p:nvSpPr>
-          <p:spPr>
-            <a:xfrm>
-              <a:off x="5006981" y="5884826"/>
-              <a:ext cx="68305" cy="109728"/>
-            </a:xfrm>
-            <a:prstGeom prst="rect">
-              <a:avLst/>
-            </a:prstGeom>
-            <a:noFill/>
-          </p:spPr>
-          <p:txBody>
-            <a:bodyPr lIns="0" rIns="0" tIns="0" bIns="0" anchorCtr="1" anchor="ctr" wrap="none"/>
-            <a:lstStyle/>
-            <a:p>
-              <a:pPr algn="l" marL="0" marR="0" indent="0">
-                <a:lnSpc>
-                  <a:spcPts val="979"/>
-                </a:lnSpc>
-                <a:spcBef>
-                  <a:spcPts val="0"/>
-                </a:spcBef>
-                <a:spcAft>
-                  <a:spcPts val="0"/>
-                </a:spcAft>
-              </a:pPr>
-              <a:r>
-                <a:rPr sz="979">
-                  <a:solidFill>
-                    <a:srgbClr val="000000">
-                      <a:alpha val="100000"/>
-                    </a:srgbClr>
-                  </a:solidFill>
-                  <a:latin typeface="Symbol"/>
-                  <a:cs typeface="Symbol"/>
-                </a:rPr>
-                <a:t>−</a:t>
-              </a:r>
-            </a:p>
-          </p:txBody>
-        </p:sp>
-        <p:sp>
-          <p:nvSpPr>
-            <p:cNvPr id="40" name="tx40"/>
-            <p:cNvSpPr/>
-            <p:nvPr/>
-          </p:nvSpPr>
-          <p:spPr>
-            <a:xfrm>
-              <a:off x="5075286" y="5905308"/>
-              <a:ext cx="89885" cy="89245"/>
-            </a:xfrm>
-            <a:prstGeom prst="rect">
-              <a:avLst/>
-            </a:prstGeom>
-            <a:noFill/>
-          </p:spPr>
-          <p:txBody>
-            <a:bodyPr lIns="0" rIns="0" tIns="0" bIns="0" anchorCtr="1" anchor="ctr" wrap="none"/>
-            <a:lstStyle/>
-            <a:p>
-              <a:pPr algn="l" marL="0" marR="0" indent="0">
-                <a:lnSpc>
-                  <a:spcPts val="979"/>
-                </a:lnSpc>
-                <a:spcBef>
-                  <a:spcPts val="0"/>
-                </a:spcBef>
-                <a:spcAft>
-                  <a:spcPts val="0"/>
-                </a:spcAft>
-              </a:pPr>
-              <a:r>
-                <a:rPr sz="979">
-                  <a:solidFill>
-                    <a:srgbClr val="000000">
-                      <a:alpha val="100000"/>
-                    </a:srgbClr>
-                  </a:solidFill>
-                  <a:latin typeface="Helvetica"/>
-                  <a:cs typeface="Helvetica"/>
-                </a:rPr>
-                <a:t>C</a:t>
-              </a:r>
-            </a:p>
-          </p:txBody>
-        </p:sp>
-        <p:sp>
-          <p:nvSpPr>
-            <p:cNvPr id="41" name="tx41"/>
-            <p:cNvSpPr/>
-            <p:nvPr/>
-          </p:nvSpPr>
-          <p:spPr>
-            <a:xfrm>
-              <a:off x="5165172" y="5905308"/>
-              <a:ext cx="83027" cy="89245"/>
-            </a:xfrm>
-            <a:prstGeom prst="rect">
-              <a:avLst/>
-            </a:prstGeom>
-            <a:noFill/>
-          </p:spPr>
-          <p:txBody>
-            <a:bodyPr lIns="0" rIns="0" tIns="0" bIns="0" anchorCtr="1" anchor="ctr" wrap="none"/>
-            <a:lstStyle/>
-            <a:p>
-              <a:pPr algn="l" marL="0" marR="0" indent="0">
-                <a:lnSpc>
-                  <a:spcPts val="979"/>
-                </a:lnSpc>
-                <a:spcBef>
-                  <a:spcPts val="0"/>
-                </a:spcBef>
-                <a:spcAft>
-                  <a:spcPts val="0"/>
-                </a:spcAft>
-              </a:pPr>
-              <a:r>
-                <a:rPr sz="979">
-                  <a:solidFill>
-                    <a:srgbClr val="000000">
-                      <a:alpha val="100000"/>
-                    </a:srgbClr>
-                  </a:solidFill>
-                  <a:latin typeface="Helvetica"/>
-                  <a:cs typeface="Helvetica"/>
-                </a:rPr>
-                <a:t>Y</a:t>
-              </a:r>
-            </a:p>
-          </p:txBody>
-        </p:sp>
-        <p:sp>
-          <p:nvSpPr>
-            <p:cNvPr id="42" name="tx42"/>
-            <p:cNvSpPr/>
-            <p:nvPr/>
-          </p:nvSpPr>
-          <p:spPr>
-            <a:xfrm>
-              <a:off x="5248199" y="5905308"/>
-              <a:ext cx="83027" cy="89245"/>
-            </a:xfrm>
-            <a:prstGeom prst="rect">
-              <a:avLst/>
-            </a:prstGeom>
-            <a:noFill/>
-          </p:spPr>
-          <p:txBody>
-            <a:bodyPr lIns="0" rIns="0" tIns="0" bIns="0" anchorCtr="1" anchor="ctr" wrap="none"/>
-            <a:lstStyle/>
-            <a:p>
-              <a:pPr algn="l" marL="0" marR="0" indent="0">
-                <a:lnSpc>
-                  <a:spcPts val="979"/>
-                </a:lnSpc>
-                <a:spcBef>
-                  <a:spcPts val="0"/>
-                </a:spcBef>
-                <a:spcAft>
-                  <a:spcPts val="0"/>
-                </a:spcAft>
-              </a:pPr>
-              <a:r>
-                <a:rPr sz="979">
-                  <a:solidFill>
-                    <a:srgbClr val="000000">
-                      <a:alpha val="100000"/>
-                    </a:srgbClr>
-                  </a:solidFill>
-                  <a:latin typeface="Helvetica"/>
-                  <a:cs typeface="Helvetica"/>
-                </a:rPr>
-                <a:t>S</a:t>
-              </a:r>
-            </a:p>
-          </p:txBody>
-        </p:sp>
-        <p:sp>
-          <p:nvSpPr>
-            <p:cNvPr id="43" name="tx43"/>
-            <p:cNvSpPr/>
-            <p:nvPr/>
-          </p:nvSpPr>
-          <p:spPr>
-            <a:xfrm>
-              <a:off x="5331227" y="5834415"/>
-              <a:ext cx="558149" cy="127558"/>
-            </a:xfrm>
-            <a:prstGeom prst="rect">
-              <a:avLst/>
-            </a:prstGeom>
-            <a:noFill/>
-          </p:spPr>
-          <p:txBody>
-            <a:bodyPr lIns="0" rIns="0" tIns="0" bIns="0" anchorCtr="1" anchor="ctr" wrap="none"/>
-            <a:lstStyle/>
-            <a:p>
-              <a:pPr algn="l" marL="0" marR="0" indent="0">
-                <a:lnSpc>
-                  <a:spcPts val="1400"/>
-                </a:lnSpc>
-                <a:spcBef>
-                  <a:spcPts val="0"/>
-                </a:spcBef>
-                <a:spcAft>
-                  <a:spcPts val="0"/>
-                </a:spcAft>
-              </a:pPr>
-              <a:r>
-                <a:rPr sz="1400">
-                  <a:solidFill>
-                    <a:srgbClr val="000000">
-                      <a:alpha val="100000"/>
-                    </a:srgbClr>
-                  </a:solidFill>
-                  <a:latin typeface="Helvetica"/>
-                  <a:cs typeface="Helvetica"/>
-                </a:rPr>
-                <a:t> − CrCl</a:t>
-              </a:r>
-            </a:p>
-          </p:txBody>
-        </p:sp>
-        <p:sp>
-          <p:nvSpPr>
-            <p:cNvPr id="44" name="tx44"/>
-            <p:cNvSpPr/>
-            <p:nvPr/>
-          </p:nvSpPr>
-          <p:spPr>
-            <a:xfrm>
-              <a:off x="5889377" y="5905308"/>
-              <a:ext cx="89885" cy="89245"/>
-            </a:xfrm>
-            <a:prstGeom prst="rect">
-              <a:avLst/>
-            </a:prstGeom>
-            <a:noFill/>
-          </p:spPr>
-          <p:txBody>
-            <a:bodyPr lIns="0" rIns="0" tIns="0" bIns="0" anchorCtr="1" anchor="ctr" wrap="none"/>
-            <a:lstStyle/>
-            <a:p>
-              <a:pPr algn="l" marL="0" marR="0" indent="0">
-                <a:lnSpc>
-                  <a:spcPts val="979"/>
-                </a:lnSpc>
-                <a:spcBef>
-                  <a:spcPts val="0"/>
-                </a:spcBef>
-                <a:spcAft>
-                  <a:spcPts val="0"/>
-                </a:spcAft>
-              </a:pPr>
-              <a:r>
-                <a:rPr sz="979">
-                  <a:solidFill>
-                    <a:srgbClr val="000000">
-                      <a:alpha val="100000"/>
-                    </a:srgbClr>
-                  </a:solidFill>
-                  <a:latin typeface="Helvetica"/>
-                  <a:cs typeface="Helvetica"/>
-                </a:rPr>
-                <a:t>C</a:t>
-              </a:r>
-            </a:p>
-          </p:txBody>
-        </p:sp>
-        <p:sp>
-          <p:nvSpPr>
-            <p:cNvPr id="45" name="tx45"/>
-            <p:cNvSpPr/>
-            <p:nvPr/>
-          </p:nvSpPr>
-          <p:spPr>
-            <a:xfrm>
-              <a:off x="5979262" y="5905308"/>
-              <a:ext cx="96743" cy="89245"/>
-            </a:xfrm>
-            <a:prstGeom prst="rect">
-              <a:avLst/>
-            </a:prstGeom>
-            <a:noFill/>
-          </p:spPr>
-          <p:txBody>
-            <a:bodyPr lIns="0" rIns="0" tIns="0" bIns="0" anchorCtr="1" anchor="ctr" wrap="none"/>
-            <a:lstStyle/>
-            <a:p>
-              <a:pPr algn="l" marL="0" marR="0" indent="0">
-                <a:lnSpc>
-                  <a:spcPts val="979"/>
-                </a:lnSpc>
-                <a:spcBef>
-                  <a:spcPts val="0"/>
-                </a:spcBef>
-                <a:spcAft>
-                  <a:spcPts val="0"/>
-                </a:spcAft>
-              </a:pPr>
-              <a:r>
-                <a:rPr sz="979">
-                  <a:solidFill>
-                    <a:srgbClr val="000000">
-                      <a:alpha val="100000"/>
-                    </a:srgbClr>
-                  </a:solidFill>
-                  <a:latin typeface="Helvetica"/>
-                  <a:cs typeface="Helvetica"/>
-                </a:rPr>
-                <a:t>G</a:t>
-              </a:r>
-            </a:p>
-          </p:txBody>
-        </p:sp>
-        <p:sp>
-          <p:nvSpPr>
-            <p:cNvPr id="46" name="tx46"/>
-            <p:cNvSpPr/>
-            <p:nvPr/>
-          </p:nvSpPr>
-          <p:spPr>
-            <a:xfrm>
-              <a:off x="6076006" y="5834415"/>
-              <a:ext cx="562904" cy="127558"/>
-            </a:xfrm>
-            <a:prstGeom prst="rect">
-              <a:avLst/>
-            </a:prstGeom>
-            <a:noFill/>
-          </p:spPr>
-          <p:txBody>
-            <a:bodyPr lIns="0" rIns="0" tIns="0" bIns="0" anchorCtr="1" anchor="ctr" wrap="none"/>
-            <a:lstStyle/>
-            <a:p>
-              <a:pPr algn="l" marL="0" marR="0" indent="0">
-                <a:lnSpc>
-                  <a:spcPts val="1400"/>
-                </a:lnSpc>
-                <a:spcBef>
-                  <a:spcPts val="0"/>
-                </a:spcBef>
-                <a:spcAft>
-                  <a:spcPts val="0"/>
-                </a:spcAft>
-              </a:pPr>
-              <a:r>
-                <a:rPr sz="1400">
-                  <a:solidFill>
-                    <a:srgbClr val="000000">
-                      <a:alpha val="100000"/>
-                    </a:srgbClr>
-                  </a:solidFill>
-                  <a:latin typeface="Helvetica"/>
-                  <a:cs typeface="Helvetica"/>
-                </a:rPr>
-                <a:t>) / CrCl</a:t>
-              </a:r>
-            </a:p>
-          </p:txBody>
-        </p:sp>
-        <p:sp>
-          <p:nvSpPr>
-            <p:cNvPr id="47" name="tx47"/>
-            <p:cNvSpPr/>
-            <p:nvPr/>
-          </p:nvSpPr>
-          <p:spPr>
-            <a:xfrm>
-              <a:off x="6638910" y="5905308"/>
-              <a:ext cx="89885" cy="89245"/>
-            </a:xfrm>
-            <a:prstGeom prst="rect">
-              <a:avLst/>
-            </a:prstGeom>
-            <a:noFill/>
-          </p:spPr>
-          <p:txBody>
-            <a:bodyPr lIns="0" rIns="0" tIns="0" bIns="0" anchorCtr="1" anchor="ctr" wrap="none"/>
-            <a:lstStyle/>
-            <a:p>
-              <a:pPr algn="l" marL="0" marR="0" indent="0">
-                <a:lnSpc>
-                  <a:spcPts val="979"/>
-                </a:lnSpc>
-                <a:spcBef>
-                  <a:spcPts val="0"/>
-                </a:spcBef>
-                <a:spcAft>
-                  <a:spcPts val="0"/>
-                </a:spcAft>
-              </a:pPr>
-              <a:r>
-                <a:rPr sz="979">
-                  <a:solidFill>
-                    <a:srgbClr val="000000">
-                      <a:alpha val="100000"/>
-                    </a:srgbClr>
-                  </a:solidFill>
-                  <a:latin typeface="Helvetica"/>
-                  <a:cs typeface="Helvetica"/>
-                </a:rPr>
-                <a:t>C</a:t>
-              </a:r>
-            </a:p>
-          </p:txBody>
-        </p:sp>
-        <p:sp>
-          <p:nvSpPr>
-            <p:cNvPr id="48" name="tx48"/>
-            <p:cNvSpPr/>
-            <p:nvPr/>
-          </p:nvSpPr>
-          <p:spPr>
-            <a:xfrm>
-              <a:off x="6728796" y="5905308"/>
-              <a:ext cx="96743" cy="89245"/>
-            </a:xfrm>
-            <a:prstGeom prst="rect">
-              <a:avLst/>
-            </a:prstGeom>
-            <a:noFill/>
-          </p:spPr>
-          <p:txBody>
-            <a:bodyPr lIns="0" rIns="0" tIns="0" bIns="0" anchorCtr="1" anchor="ctr" wrap="none"/>
-            <a:lstStyle/>
-            <a:p>
-              <a:pPr algn="l" marL="0" marR="0" indent="0">
-                <a:lnSpc>
-                  <a:spcPts val="979"/>
-                </a:lnSpc>
-                <a:spcBef>
-                  <a:spcPts val="0"/>
-                </a:spcBef>
-                <a:spcAft>
-                  <a:spcPts val="0"/>
-                </a:spcAft>
-              </a:pPr>
-              <a:r>
-                <a:rPr sz="979">
-                  <a:solidFill>
-                    <a:srgbClr val="000000">
-                      <a:alpha val="100000"/>
-                    </a:srgbClr>
-                  </a:solidFill>
-                  <a:latin typeface="Helvetica"/>
-                  <a:cs typeface="Helvetica"/>
-                </a:rPr>
-                <a:t>G</a:t>
-              </a:r>
-            </a:p>
-          </p:txBody>
-        </p:sp>
-        <p:sp>
-          <p:nvSpPr>
-            <p:cNvPr id="49" name="tx49"/>
+            <p:cNvPr id="50" name="tx50"/>
             <p:cNvSpPr/>
             <p:nvPr/>
           </p:nvSpPr>
           <p:spPr>
             <a:xfrm rot="-5400000">
-              <a:off x="-37527" y="3827572"/>
+              <a:off x="-37527" y="3835619"/>
               <a:ext cx="1294150" cy="127558"/>
             </a:xfrm>
             <a:prstGeom prst="rect">
@@ -5563,14 +5582,14 @@
         </p:sp>
         <p:sp>
           <p:nvSpPr>
-            <p:cNvPr id="50" name="tx50"/>
+            <p:cNvPr id="51" name="tx51"/>
             <p:cNvSpPr/>
             <p:nvPr/>
           </p:nvSpPr>
           <p:spPr>
             <a:xfrm>
               <a:off x="915645" y="1977589"/>
-              <a:ext cx="5929701" cy="109362"/>
+              <a:ext cx="3712646" cy="91165"/>
             </a:xfrm>
             <a:prstGeom prst="rect">
               <a:avLst/>
@@ -5583,7 +5602,7 @@
             <a:p>
               <a:pPr algn="l" marL="0" marR="0" indent="0">
                 <a:lnSpc>
-                  <a:spcPts val="1200"/>
+                  <a:spcPts val="1000"/>
                 </a:lnSpc>
                 <a:spcBef>
                   <a:spcPts val="0"/>
@@ -5593,7 +5612,7 @@
                 </a:spcAft>
               </a:pPr>
               <a:r>
-                <a:rPr sz="1200">
+                <a:rPr sz="1000">
                   <a:solidFill>
                     <a:srgbClr val="404040">
                       <a:alpha val="100000"/>
@@ -5602,14 +5621,14 @@
                   <a:latin typeface="Helvetica"/>
                   <a:cs typeface="Helvetica"/>
                 </a:rPr>
-                <a:t>subHR = 0.71 (95% CI 0.46-1.09), p = 0.118   (per 0.1-unit increase in eGFR difference)</a:t>
+                <a:t>subHR = 1.42 (95% CI 0.92-2.20), p = 0.118   (per 10% decrease)</a:t>
               </a:r>
             </a:p>
           </p:txBody>
         </p:sp>
         <p:sp>
           <p:nvSpPr>
-            <p:cNvPr id="51" name="tx51"/>
+            <p:cNvPr id="52" name="tx52"/>
             <p:cNvSpPr/>
             <p:nvPr/>
           </p:nvSpPr>
